--- a/Seminario/Máquinas de Turing com Pilhas.pptx
+++ b/Seminario/Máquinas de Turing com Pilhas.pptx
@@ -19,23 +19,24 @@
     <p:sldId id="264" r:id="rId15"/>
     <p:sldId id="265" r:id="rId16"/>
     <p:sldId id="266" r:id="rId17"/>
+    <p:sldId id="267" r:id="rId18"/>
   </p:sldIdLst>
   <p:sldSz cy="6858000" cx="12192000"/>
   <p:notesSz cx="6858000" cy="9144000"/>
   <p:embeddedFontLst>
     <p:embeddedFont>
       <p:font typeface="Poppins"/>
-      <p:regular r:id="rId18"/>
-      <p:bold r:id="rId19"/>
-      <p:italic r:id="rId20"/>
-      <p:boldItalic r:id="rId21"/>
+      <p:regular r:id="rId19"/>
+      <p:bold r:id="rId20"/>
+      <p:italic r:id="rId21"/>
+      <p:boldItalic r:id="rId22"/>
     </p:embeddedFont>
     <p:embeddedFont>
       <p:font typeface="Lato"/>
-      <p:regular r:id="rId22"/>
-      <p:bold r:id="rId23"/>
-      <p:italic r:id="rId24"/>
-      <p:boldItalic r:id="rId25"/>
+      <p:regular r:id="rId23"/>
+      <p:bold r:id="rId24"/>
+      <p:italic r:id="rId25"/>
+      <p:boldItalic r:id="rId26"/>
     </p:embeddedFont>
   </p:embeddedFontLst>
   <p:defaultTextStyle>
@@ -830,7 +831,7 @@
       </p:grpSpPr>
       <p:sp>
         <p:nvSpPr>
-          <p:cNvPr id="220" name="Google Shape;220;p10:notes"/>
+          <p:cNvPr id="220" name="Google Shape;220;p9:notes"/>
           <p:cNvSpPr txBox="1"/>
           <p:nvPr>
             <p:ph idx="1" type="body"/>
@@ -869,7 +870,7 @@
       </p:sp>
       <p:sp>
         <p:nvSpPr>
-          <p:cNvPr id="221" name="Google Shape;221;p10:notes"/>
+          <p:cNvPr id="221" name="Google Shape;221;p9:notes"/>
           <p:cNvSpPr/>
           <p:nvPr>
             <p:ph idx="2" type="sldImg"/>
@@ -915,7 +916,7 @@
   <p:cSld>
     <p:spTree>
       <p:nvGrpSpPr>
-        <p:cNvPr id="229" name="Shape 229"/>
+        <p:cNvPr id="238" name="Shape 238"/>
         <p:cNvGrpSpPr/>
         <p:nvPr/>
       </p:nvGrpSpPr>
@@ -929,7 +930,7 @@
       </p:grpSpPr>
       <p:sp>
         <p:nvSpPr>
-          <p:cNvPr id="230" name="Google Shape;230;p11:notes"/>
+          <p:cNvPr id="239" name="Google Shape;239;p10:notes"/>
           <p:cNvSpPr txBox="1"/>
           <p:nvPr>
             <p:ph idx="1" type="body"/>
@@ -968,7 +969,106 @@
       </p:sp>
       <p:sp>
         <p:nvSpPr>
-          <p:cNvPr id="231" name="Google Shape;231;p11:notes"/>
+          <p:cNvPr id="240" name="Google Shape;240;p10:notes"/>
+          <p:cNvSpPr/>
+          <p:nvPr>
+            <p:ph idx="2" type="sldImg"/>
+          </p:nvPr>
+        </p:nvSpPr>
+        <p:spPr>
+          <a:xfrm>
+            <a:off x="1143225" y="685800"/>
+            <a:ext cx="4572225" cy="3429000"/>
+          </a:xfrm>
+          <a:custGeom>
+            <a:rect b="b" l="l" r="r" t="t"/>
+            <a:pathLst>
+              <a:path extrusionOk="0" h="120000" w="120000">
+                <a:moveTo>
+                  <a:pt x="0" y="0"/>
+                </a:moveTo>
+                <a:lnTo>
+                  <a:pt x="120000" y="0"/>
+                </a:lnTo>
+                <a:lnTo>
+                  <a:pt x="120000" y="120000"/>
+                </a:lnTo>
+                <a:lnTo>
+                  <a:pt x="0" y="120000"/>
+                </a:lnTo>
+                <a:close/>
+              </a:path>
+            </a:pathLst>
+          </a:custGeom>
+        </p:spPr>
+      </p:sp>
+    </p:spTree>
+  </p:cSld>
+  <p:clrMapOvr>
+    <a:masterClrMapping/>
+  </p:clrMapOvr>
+</p:notes>
+</file>
+
+<file path=ppt/notesSlides/notesSlide12.xml><?xml version="1.0" encoding="utf-8"?>
+<p:notes xmlns:a="http://schemas.openxmlformats.org/drawingml/2006/main" xmlns:r="http://schemas.openxmlformats.org/officeDocument/2006/relationships" xmlns:mc="http://schemas.openxmlformats.org/markup-compatibility/2006" xmlns:mv="urn:schemas-microsoft-com:mac:vml" xmlns:p="http://schemas.openxmlformats.org/presentationml/2006/main" xmlns:c="http://schemas.openxmlformats.org/drawingml/2006/chart" xmlns:dgm="http://schemas.openxmlformats.org/drawingml/2006/diagram" xmlns:o="urn:schemas-microsoft-com:office:office" xmlns:v="urn:schemas-microsoft-com:vml" xmlns:pvml="urn:schemas-microsoft-com:office:powerpoint" xmlns:com="http://schemas.openxmlformats.org/drawingml/2006/compatibility" xmlns:p14="http://schemas.microsoft.com/office/powerpoint/2010/main" xmlns:p15="http://schemas.microsoft.com/office/powerpoint/2012/main" xmlns:ahyp="http://schemas.microsoft.com/office/drawing/2018/hyperlinkcolor" showMasterPhAnim="0" showMasterSp="0">
+  <p:cSld>
+    <p:spTree>
+      <p:nvGrpSpPr>
+        <p:cNvPr id="248" name="Shape 248"/>
+        <p:cNvGrpSpPr/>
+        <p:nvPr/>
+      </p:nvGrpSpPr>
+      <p:grpSpPr>
+        <a:xfrm>
+          <a:off x="0" y="0"/>
+          <a:ext cx="0" cy="0"/>
+          <a:chOff x="0" y="0"/>
+          <a:chExt cx="0" cy="0"/>
+        </a:xfrm>
+      </p:grpSpPr>
+      <p:sp>
+        <p:nvSpPr>
+          <p:cNvPr id="249" name="Google Shape;249;p11:notes"/>
+          <p:cNvSpPr txBox="1"/>
+          <p:nvPr>
+            <p:ph idx="1" type="body"/>
+          </p:nvPr>
+        </p:nvSpPr>
+        <p:spPr>
+          <a:xfrm>
+            <a:off x="685800" y="4343400"/>
+            <a:ext cx="5486400" cy="4114800"/>
+          </a:xfrm>
+          <a:prstGeom prst="rect">
+            <a:avLst/>
+          </a:prstGeom>
+        </p:spPr>
+        <p:txBody>
+          <a:bodyPr anchorCtr="0" anchor="t" bIns="91425" lIns="91425" spcFirstLastPara="1" rIns="91425" wrap="square" tIns="91425">
+            <a:noAutofit/>
+          </a:bodyPr>
+          <a:lstStyle/>
+          <a:p>
+            <a:pPr indent="0" lvl="0" marL="0" rtl="0" algn="l">
+              <a:spcBef>
+                <a:spcPts val="0"/>
+              </a:spcBef>
+              <a:spcAft>
+                <a:spcPts val="0"/>
+              </a:spcAft>
+              <a:buNone/>
+            </a:pPr>
+            <a:r>
+              <a:t/>
+            </a:r>
+            <a:endParaRPr/>
+          </a:p>
+        </p:txBody>
+      </p:sp>
+      <p:sp>
+        <p:nvSpPr>
+          <p:cNvPr id="250" name="Google Shape;250;p11:notes"/>
           <p:cNvSpPr/>
           <p:nvPr>
             <p:ph idx="2" type="sldImg"/>
@@ -1226,7 +1326,7 @@
       </p:grpSpPr>
       <p:sp>
         <p:nvSpPr>
-          <p:cNvPr id="109" name="Google Shape;109;p4:notes"/>
+          <p:cNvPr id="109" name="Google Shape;109;g3e8cb87935b_1_0:notes"/>
           <p:cNvSpPr txBox="1"/>
           <p:nvPr>
             <p:ph idx="1" type="body"/>
@@ -1265,7 +1365,7 @@
       </p:sp>
       <p:sp>
         <p:nvSpPr>
-          <p:cNvPr id="110" name="Google Shape;110;p4:notes"/>
+          <p:cNvPr id="110" name="Google Shape;110;g3e8cb87935b_1_0:notes"/>
           <p:cNvSpPr/>
           <p:nvPr>
             <p:ph idx="2" type="sldImg"/>
@@ -1274,7 +1374,7 @@
         <p:spPr>
           <a:xfrm>
             <a:off x="1143225" y="685800"/>
-            <a:ext cx="4572225" cy="3429000"/>
+            <a:ext cx="4572300" cy="3429000"/>
           </a:xfrm>
           <a:custGeom>
             <a:rect b="b" l="l" r="r" t="t"/>
@@ -1311,7 +1411,7 @@
   <p:cSld>
     <p:spTree>
       <p:nvGrpSpPr>
-        <p:cNvPr id="123" name="Shape 123"/>
+        <p:cNvPr id="127" name="Shape 127"/>
         <p:cNvGrpSpPr/>
         <p:nvPr/>
       </p:nvGrpSpPr>
@@ -1325,7 +1425,7 @@
       </p:grpSpPr>
       <p:sp>
         <p:nvSpPr>
-          <p:cNvPr id="124" name="Google Shape;124;p5:notes"/>
+          <p:cNvPr id="128" name="Google Shape;128;p4:notes"/>
           <p:cNvSpPr txBox="1"/>
           <p:nvPr>
             <p:ph idx="1" type="body"/>
@@ -1364,7 +1464,7 @@
       </p:sp>
       <p:sp>
         <p:nvSpPr>
-          <p:cNvPr id="125" name="Google Shape;125;p5:notes"/>
+          <p:cNvPr id="129" name="Google Shape;129;p4:notes"/>
           <p:cNvSpPr/>
           <p:nvPr>
             <p:ph idx="2" type="sldImg"/>
@@ -1373,7 +1473,7 @@
         <p:spPr>
           <a:xfrm>
             <a:off x="1143225" y="685800"/>
-            <a:ext cx="4572300" cy="3429000"/>
+            <a:ext cx="4572225" cy="3429000"/>
           </a:xfrm>
           <a:custGeom>
             <a:rect b="b" l="l" r="r" t="t"/>
@@ -1410,7 +1510,7 @@
   <p:cSld>
     <p:spTree>
       <p:nvGrpSpPr>
-        <p:cNvPr id="137" name="Shape 137"/>
+        <p:cNvPr id="142" name="Shape 142"/>
         <p:cNvGrpSpPr/>
         <p:nvPr/>
       </p:nvGrpSpPr>
@@ -1424,7 +1524,7 @@
       </p:grpSpPr>
       <p:sp>
         <p:nvSpPr>
-          <p:cNvPr id="138" name="Google Shape;138;p6:notes"/>
+          <p:cNvPr id="143" name="Google Shape;143;p5:notes"/>
           <p:cNvSpPr txBox="1"/>
           <p:nvPr>
             <p:ph idx="1" type="body"/>
@@ -1463,7 +1563,7 @@
       </p:sp>
       <p:sp>
         <p:nvSpPr>
-          <p:cNvPr id="139" name="Google Shape;139;p6:notes"/>
+          <p:cNvPr id="144" name="Google Shape;144;p5:notes"/>
           <p:cNvSpPr/>
           <p:nvPr>
             <p:ph idx="2" type="sldImg"/>
@@ -1472,7 +1572,7 @@
         <p:spPr>
           <a:xfrm>
             <a:off x="1143225" y="685800"/>
-            <a:ext cx="4572225" cy="3429000"/>
+            <a:ext cx="4572300" cy="3429000"/>
           </a:xfrm>
           <a:custGeom>
             <a:rect b="b" l="l" r="r" t="t"/>
@@ -1509,7 +1609,7 @@
   <p:cSld>
     <p:spTree>
       <p:nvGrpSpPr>
-        <p:cNvPr id="154" name="Shape 154"/>
+        <p:cNvPr id="156" name="Shape 156"/>
         <p:cNvGrpSpPr/>
         <p:nvPr/>
       </p:nvGrpSpPr>
@@ -1523,7 +1623,7 @@
       </p:grpSpPr>
       <p:sp>
         <p:nvSpPr>
-          <p:cNvPr id="155" name="Google Shape;155;p7:notes"/>
+          <p:cNvPr id="157" name="Google Shape;157;p6:notes"/>
           <p:cNvSpPr txBox="1"/>
           <p:nvPr>
             <p:ph idx="1" type="body"/>
@@ -1562,7 +1662,7 @@
       </p:sp>
       <p:sp>
         <p:nvSpPr>
-          <p:cNvPr id="156" name="Google Shape;156;p7:notes"/>
+          <p:cNvPr id="158" name="Google Shape;158;p6:notes"/>
           <p:cNvSpPr/>
           <p:nvPr>
             <p:ph idx="2" type="sldImg"/>
@@ -1608,7 +1708,7 @@
   <p:cSld>
     <p:spTree>
       <p:nvGrpSpPr>
-        <p:cNvPr id="172" name="Shape 172"/>
+        <p:cNvPr id="173" name="Shape 173"/>
         <p:cNvGrpSpPr/>
         <p:nvPr/>
       </p:nvGrpSpPr>
@@ -1622,7 +1722,7 @@
       </p:grpSpPr>
       <p:sp>
         <p:nvSpPr>
-          <p:cNvPr id="173" name="Google Shape;173;p8:notes"/>
+          <p:cNvPr id="174" name="Google Shape;174;p7:notes"/>
           <p:cNvSpPr txBox="1"/>
           <p:nvPr>
             <p:ph idx="1" type="body"/>
@@ -1661,7 +1761,7 @@
       </p:sp>
       <p:sp>
         <p:nvSpPr>
-          <p:cNvPr id="174" name="Google Shape;174;p8:notes"/>
+          <p:cNvPr id="175" name="Google Shape;175;p7:notes"/>
           <p:cNvSpPr/>
           <p:nvPr>
             <p:ph idx="2" type="sldImg"/>
@@ -1707,7 +1807,7 @@
   <p:cSld>
     <p:spTree>
       <p:nvGrpSpPr>
-        <p:cNvPr id="200" name="Shape 200"/>
+        <p:cNvPr id="191" name="Shape 191"/>
         <p:cNvGrpSpPr/>
         <p:nvPr/>
       </p:nvGrpSpPr>
@@ -1721,7 +1821,7 @@
       </p:grpSpPr>
       <p:sp>
         <p:nvSpPr>
-          <p:cNvPr id="201" name="Google Shape;201;p9:notes"/>
+          <p:cNvPr id="192" name="Google Shape;192;p8:notes"/>
           <p:cNvSpPr txBox="1"/>
           <p:nvPr>
             <p:ph idx="1" type="body"/>
@@ -1760,7 +1860,7 @@
       </p:sp>
       <p:sp>
         <p:nvSpPr>
-          <p:cNvPr id="202" name="Google Shape;202;p9:notes"/>
+          <p:cNvPr id="193" name="Google Shape;193;p8:notes"/>
           <p:cNvSpPr/>
           <p:nvPr>
             <p:ph idx="2" type="sldImg"/>
@@ -11728,6 +11828,814 @@
       <p:sp>
         <p:nvSpPr>
           <p:cNvPr id="224" name="Google Shape;224;p22"/>
+          <p:cNvSpPr/>
+          <p:nvPr/>
+        </p:nvSpPr>
+        <p:spPr>
+          <a:xfrm>
+            <a:off x="571500" y="3871912"/>
+            <a:ext cx="11049000" cy="38100"/>
+          </a:xfrm>
+          <a:prstGeom prst="rect">
+            <a:avLst/>
+          </a:prstGeom>
+          <a:solidFill>
+            <a:srgbClr val="E2E8F0"/>
+          </a:solidFill>
+          <a:ln>
+            <a:noFill/>
+          </a:ln>
+        </p:spPr>
+        <p:txBody>
+          <a:bodyPr anchorCtr="0" anchor="ctr" bIns="45700" lIns="91425" spcFirstLastPara="1" rIns="91425" wrap="square" tIns="45700">
+            <a:noAutofit/>
+          </a:bodyPr>
+          <a:lstStyle/>
+          <a:p>
+            <a:pPr indent="0" lvl="0" marL="0" marR="0" rtl="0" algn="ctr">
+              <a:spcBef>
+                <a:spcPts val="0"/>
+              </a:spcBef>
+              <a:spcAft>
+                <a:spcPts val="0"/>
+              </a:spcAft>
+              <a:buNone/>
+            </a:pPr>
+            <a:r>
+              <a:t/>
+            </a:r>
+            <a:endParaRPr b="0" i="0" sz="1800" u="none" cap="none" strike="noStrike">
+              <a:solidFill>
+                <a:schemeClr val="dk1"/>
+              </a:solidFill>
+              <a:latin typeface="Calibri"/>
+              <a:ea typeface="Calibri"/>
+              <a:cs typeface="Calibri"/>
+              <a:sym typeface="Calibri"/>
+            </a:endParaRPr>
+          </a:p>
+        </p:txBody>
+      </p:sp>
+      <p:sp>
+        <p:nvSpPr>
+          <p:cNvPr id="225" name="Google Shape;225;p22"/>
+          <p:cNvSpPr txBox="1"/>
+          <p:nvPr/>
+        </p:nvSpPr>
+        <p:spPr>
+          <a:xfrm>
+            <a:off x="510733" y="4354710"/>
+            <a:ext cx="2552193" cy="400050"/>
+          </a:xfrm>
+          <a:prstGeom prst="rect">
+            <a:avLst/>
+          </a:prstGeom>
+          <a:noFill/>
+          <a:ln>
+            <a:noFill/>
+          </a:ln>
+        </p:spPr>
+        <p:txBody>
+          <a:bodyPr anchorCtr="0" anchor="t" bIns="0" lIns="0" spcFirstLastPara="1" rIns="0" wrap="square" tIns="0">
+            <a:spAutoFit/>
+          </a:bodyPr>
+          <a:lstStyle/>
+          <a:p>
+            <a:pPr indent="0" lvl="0" marL="0" marR="0" rtl="0" algn="ctr">
+              <a:spcBef>
+                <a:spcPts val="0"/>
+              </a:spcBef>
+              <a:spcAft>
+                <a:spcPts val="0"/>
+              </a:spcAft>
+              <a:buNone/>
+            </a:pPr>
+            <a:r>
+              <a:rPr b="1" i="0" lang="en-US" sz="2100" u="none" cap="none" strike="noStrike">
+                <a:solidFill>
+                  <a:srgbClr val="1E293B"/>
+                </a:solidFill>
+                <a:latin typeface="Poppins"/>
+                <a:ea typeface="Poppins"/>
+                <a:cs typeface="Poppins"/>
+                <a:sym typeface="Poppins"/>
+              </a:rPr>
+              <a:t>Leitura de 'a'</a:t>
+            </a:r>
+            <a:endParaRPr/>
+          </a:p>
+        </p:txBody>
+      </p:sp>
+      <p:sp>
+        <p:nvSpPr>
+          <p:cNvPr id="226" name="Google Shape;226;p22"/>
+          <p:cNvSpPr txBox="1"/>
+          <p:nvPr/>
+        </p:nvSpPr>
+        <p:spPr>
+          <a:xfrm>
+            <a:off x="571500" y="4945260"/>
+            <a:ext cx="2430660" cy="609600"/>
+          </a:xfrm>
+          <a:prstGeom prst="rect">
+            <a:avLst/>
+          </a:prstGeom>
+          <a:noFill/>
+          <a:ln>
+            <a:noFill/>
+          </a:ln>
+        </p:spPr>
+        <p:txBody>
+          <a:bodyPr anchorCtr="0" anchor="t" bIns="0" lIns="0" spcFirstLastPara="1" rIns="0" wrap="square" tIns="0">
+            <a:spAutoFit/>
+          </a:bodyPr>
+          <a:lstStyle/>
+          <a:p>
+            <a:pPr indent="0" lvl="0" marL="0" marR="0" rtl="0" algn="ctr">
+              <a:lnSpc>
+                <a:spcPct val="160000"/>
+              </a:lnSpc>
+              <a:spcBef>
+                <a:spcPts val="0"/>
+              </a:spcBef>
+              <a:spcAft>
+                <a:spcPts val="0"/>
+              </a:spcAft>
+              <a:buNone/>
+            </a:pPr>
+            <a:r>
+              <a:rPr b="0" i="0" lang="en-US" sz="1500" u="none" cap="none" strike="noStrike">
+                <a:solidFill>
+                  <a:srgbClr val="475569"/>
+                </a:solidFill>
+                <a:latin typeface="Lato"/>
+                <a:ea typeface="Lato"/>
+                <a:cs typeface="Lato"/>
+                <a:sym typeface="Lato"/>
+              </a:rPr>
+              <a:t>Enquanto lê 'a', empilha 'X' na Pilha 1.</a:t>
+            </a:r>
+            <a:endParaRPr/>
+          </a:p>
+        </p:txBody>
+      </p:sp>
+      <p:sp>
+        <p:nvSpPr>
+          <p:cNvPr id="227" name="Google Shape;227;p22"/>
+          <p:cNvSpPr txBox="1"/>
+          <p:nvPr/>
+        </p:nvSpPr>
+        <p:spPr>
+          <a:xfrm>
+            <a:off x="3383413" y="1998464"/>
+            <a:ext cx="2552193" cy="400050"/>
+          </a:xfrm>
+          <a:prstGeom prst="rect">
+            <a:avLst/>
+          </a:prstGeom>
+          <a:noFill/>
+          <a:ln>
+            <a:noFill/>
+          </a:ln>
+        </p:spPr>
+        <p:txBody>
+          <a:bodyPr anchorCtr="0" anchor="t" bIns="0" lIns="0" spcFirstLastPara="1" rIns="0" wrap="square" tIns="0">
+            <a:spAutoFit/>
+          </a:bodyPr>
+          <a:lstStyle/>
+          <a:p>
+            <a:pPr indent="0" lvl="0" marL="0" marR="0" rtl="0" algn="ctr">
+              <a:spcBef>
+                <a:spcPts val="0"/>
+              </a:spcBef>
+              <a:spcAft>
+                <a:spcPts val="0"/>
+              </a:spcAft>
+              <a:buNone/>
+            </a:pPr>
+            <a:r>
+              <a:rPr b="1" i="0" lang="en-US" sz="2100" u="none" cap="none" strike="noStrike">
+                <a:solidFill>
+                  <a:srgbClr val="1E293B"/>
+                </a:solidFill>
+                <a:latin typeface="Poppins"/>
+                <a:ea typeface="Poppins"/>
+                <a:cs typeface="Poppins"/>
+                <a:sym typeface="Poppins"/>
+              </a:rPr>
+              <a:t>Leitura de 'b'</a:t>
+            </a:r>
+            <a:endParaRPr/>
+          </a:p>
+        </p:txBody>
+      </p:sp>
+      <p:sp>
+        <p:nvSpPr>
+          <p:cNvPr id="228" name="Google Shape;228;p22"/>
+          <p:cNvSpPr txBox="1"/>
+          <p:nvPr/>
+        </p:nvSpPr>
+        <p:spPr>
+          <a:xfrm>
+            <a:off x="3444180" y="2589014"/>
+            <a:ext cx="2430660" cy="609600"/>
+          </a:xfrm>
+          <a:prstGeom prst="rect">
+            <a:avLst/>
+          </a:prstGeom>
+          <a:noFill/>
+          <a:ln>
+            <a:noFill/>
+          </a:ln>
+        </p:spPr>
+        <p:txBody>
+          <a:bodyPr anchorCtr="0" anchor="t" bIns="0" lIns="0" spcFirstLastPara="1" rIns="0" wrap="square" tIns="0">
+            <a:spAutoFit/>
+          </a:bodyPr>
+          <a:lstStyle/>
+          <a:p>
+            <a:pPr indent="0" lvl="0" marL="0" marR="0" rtl="0" algn="ctr">
+              <a:lnSpc>
+                <a:spcPct val="160000"/>
+              </a:lnSpc>
+              <a:spcBef>
+                <a:spcPts val="0"/>
+              </a:spcBef>
+              <a:spcAft>
+                <a:spcPts val="0"/>
+              </a:spcAft>
+              <a:buNone/>
+            </a:pPr>
+            <a:r>
+              <a:rPr b="0" i="0" lang="en-US" sz="1500" u="none" cap="none" strike="noStrike">
+                <a:solidFill>
+                  <a:srgbClr val="475569"/>
+                </a:solidFill>
+                <a:latin typeface="Lato"/>
+                <a:ea typeface="Lato"/>
+                <a:cs typeface="Lato"/>
+                <a:sym typeface="Lato"/>
+              </a:rPr>
+              <a:t>Enquanto lê 'b', empilha 'Y' na Pilha 2.</a:t>
+            </a:r>
+            <a:endParaRPr/>
+          </a:p>
+        </p:txBody>
+      </p:sp>
+      <p:sp>
+        <p:nvSpPr>
+          <p:cNvPr id="229" name="Google Shape;229;p22"/>
+          <p:cNvSpPr txBox="1"/>
+          <p:nvPr/>
+        </p:nvSpPr>
+        <p:spPr>
+          <a:xfrm>
+            <a:off x="6256094" y="4354710"/>
+            <a:ext cx="2552193" cy="400050"/>
+          </a:xfrm>
+          <a:prstGeom prst="rect">
+            <a:avLst/>
+          </a:prstGeom>
+          <a:noFill/>
+          <a:ln>
+            <a:noFill/>
+          </a:ln>
+        </p:spPr>
+        <p:txBody>
+          <a:bodyPr anchorCtr="0" anchor="t" bIns="0" lIns="0" spcFirstLastPara="1" rIns="0" wrap="square" tIns="0">
+            <a:spAutoFit/>
+          </a:bodyPr>
+          <a:lstStyle/>
+          <a:p>
+            <a:pPr indent="0" lvl="0" marL="0" marR="0" rtl="0" algn="ctr">
+              <a:spcBef>
+                <a:spcPts val="0"/>
+              </a:spcBef>
+              <a:spcAft>
+                <a:spcPts val="0"/>
+              </a:spcAft>
+              <a:buNone/>
+            </a:pPr>
+            <a:r>
+              <a:rPr b="1" i="0" lang="en-US" sz="2100" u="none" cap="none" strike="noStrike">
+                <a:solidFill>
+                  <a:srgbClr val="1E293B"/>
+                </a:solidFill>
+                <a:latin typeface="Poppins"/>
+                <a:ea typeface="Poppins"/>
+                <a:cs typeface="Poppins"/>
+                <a:sym typeface="Poppins"/>
+              </a:rPr>
+              <a:t>Verificação 'c'</a:t>
+            </a:r>
+            <a:endParaRPr/>
+          </a:p>
+        </p:txBody>
+      </p:sp>
+      <p:sp>
+        <p:nvSpPr>
+          <p:cNvPr id="230" name="Google Shape;230;p22"/>
+          <p:cNvSpPr txBox="1"/>
+          <p:nvPr/>
+        </p:nvSpPr>
+        <p:spPr>
+          <a:xfrm>
+            <a:off x="6316860" y="4945260"/>
+            <a:ext cx="2430660" cy="609600"/>
+          </a:xfrm>
+          <a:prstGeom prst="rect">
+            <a:avLst/>
+          </a:prstGeom>
+          <a:noFill/>
+          <a:ln>
+            <a:noFill/>
+          </a:ln>
+        </p:spPr>
+        <p:txBody>
+          <a:bodyPr anchorCtr="0" anchor="t" bIns="0" lIns="0" spcFirstLastPara="1" rIns="0" wrap="square" tIns="0">
+            <a:spAutoFit/>
+          </a:bodyPr>
+          <a:lstStyle/>
+          <a:p>
+            <a:pPr indent="0" lvl="0" marL="0" marR="0" rtl="0" algn="ctr">
+              <a:lnSpc>
+                <a:spcPct val="160000"/>
+              </a:lnSpc>
+              <a:spcBef>
+                <a:spcPts val="0"/>
+              </a:spcBef>
+              <a:spcAft>
+                <a:spcPts val="0"/>
+              </a:spcAft>
+              <a:buNone/>
+            </a:pPr>
+            <a:r>
+              <a:rPr b="0" i="0" lang="en-US" sz="1500" u="none" cap="none" strike="noStrike">
+                <a:solidFill>
+                  <a:srgbClr val="475569"/>
+                </a:solidFill>
+                <a:latin typeface="Lato"/>
+                <a:ea typeface="Lato"/>
+                <a:cs typeface="Lato"/>
+                <a:sym typeface="Lato"/>
+              </a:rPr>
+              <a:t>Lê 'c', desempilha 'X' da P1 e 'Y' da P2 simultaneamente.</a:t>
+            </a:r>
+            <a:endParaRPr/>
+          </a:p>
+        </p:txBody>
+      </p:sp>
+      <p:sp>
+        <p:nvSpPr>
+          <p:cNvPr id="231" name="Google Shape;231;p22"/>
+          <p:cNvSpPr txBox="1"/>
+          <p:nvPr/>
+        </p:nvSpPr>
+        <p:spPr>
+          <a:xfrm>
+            <a:off x="9128774" y="1693664"/>
+            <a:ext cx="2552193" cy="400050"/>
+          </a:xfrm>
+          <a:prstGeom prst="rect">
+            <a:avLst/>
+          </a:prstGeom>
+          <a:noFill/>
+          <a:ln>
+            <a:noFill/>
+          </a:ln>
+        </p:spPr>
+        <p:txBody>
+          <a:bodyPr anchorCtr="0" anchor="t" bIns="0" lIns="0" spcFirstLastPara="1" rIns="0" wrap="square" tIns="0">
+            <a:spAutoFit/>
+          </a:bodyPr>
+          <a:lstStyle/>
+          <a:p>
+            <a:pPr indent="0" lvl="0" marL="0" marR="0" rtl="0" algn="ctr">
+              <a:spcBef>
+                <a:spcPts val="0"/>
+              </a:spcBef>
+              <a:spcAft>
+                <a:spcPts val="0"/>
+              </a:spcAft>
+              <a:buNone/>
+            </a:pPr>
+            <a:r>
+              <a:rPr b="1" i="0" lang="en-US" sz="2100" u="none" cap="none" strike="noStrike">
+                <a:solidFill>
+                  <a:srgbClr val="1E293B"/>
+                </a:solidFill>
+                <a:latin typeface="Poppins"/>
+                <a:ea typeface="Poppins"/>
+                <a:cs typeface="Poppins"/>
+                <a:sym typeface="Poppins"/>
+              </a:rPr>
+              <a:t>Aceitação</a:t>
+            </a:r>
+            <a:endParaRPr/>
+          </a:p>
+        </p:txBody>
+      </p:sp>
+      <p:sp>
+        <p:nvSpPr>
+          <p:cNvPr id="232" name="Google Shape;232;p22"/>
+          <p:cNvSpPr txBox="1"/>
+          <p:nvPr/>
+        </p:nvSpPr>
+        <p:spPr>
+          <a:xfrm>
+            <a:off x="9189541" y="2284214"/>
+            <a:ext cx="2430660" cy="914400"/>
+          </a:xfrm>
+          <a:prstGeom prst="rect">
+            <a:avLst/>
+          </a:prstGeom>
+          <a:noFill/>
+          <a:ln>
+            <a:noFill/>
+          </a:ln>
+        </p:spPr>
+        <p:txBody>
+          <a:bodyPr anchorCtr="0" anchor="t" bIns="0" lIns="0" spcFirstLastPara="1" rIns="0" wrap="square" tIns="0">
+            <a:spAutoFit/>
+          </a:bodyPr>
+          <a:lstStyle/>
+          <a:p>
+            <a:pPr indent="0" lvl="0" marL="0" marR="0" rtl="0" algn="ctr">
+              <a:lnSpc>
+                <a:spcPct val="160000"/>
+              </a:lnSpc>
+              <a:spcBef>
+                <a:spcPts val="0"/>
+              </a:spcBef>
+              <a:spcAft>
+                <a:spcPts val="0"/>
+              </a:spcAft>
+              <a:buNone/>
+            </a:pPr>
+            <a:r>
+              <a:rPr b="0" i="0" lang="en-US" sz="1500" u="none" cap="none" strike="noStrike">
+                <a:solidFill>
+                  <a:srgbClr val="475569"/>
+                </a:solidFill>
+                <a:latin typeface="Lato"/>
+                <a:ea typeface="Lato"/>
+                <a:cs typeface="Lato"/>
+                <a:sym typeface="Lato"/>
+              </a:rPr>
+              <a:t>Se ambas as pilhas esvaziarem ao fim da cadeia, aceite.</a:t>
+            </a:r>
+            <a:endParaRPr/>
+          </a:p>
+        </p:txBody>
+      </p:sp>
+      <p:sp>
+        <p:nvSpPr>
+          <p:cNvPr id="233" name="Google Shape;233;p22"/>
+          <p:cNvSpPr txBox="1"/>
+          <p:nvPr/>
+        </p:nvSpPr>
+        <p:spPr>
+          <a:xfrm>
+            <a:off x="571500" y="571500"/>
+            <a:ext cx="11601450" cy="600075"/>
+          </a:xfrm>
+          <a:prstGeom prst="rect">
+            <a:avLst/>
+          </a:prstGeom>
+          <a:noFill/>
+          <a:ln>
+            <a:noFill/>
+          </a:ln>
+        </p:spPr>
+        <p:txBody>
+          <a:bodyPr anchorCtr="0" anchor="t" bIns="0" lIns="0" spcFirstLastPara="1" rIns="0" wrap="square" tIns="0">
+            <a:spAutoFit/>
+          </a:bodyPr>
+          <a:lstStyle/>
+          <a:p>
+            <a:pPr indent="0" lvl="0" marL="0" marR="0" rtl="0" algn="l">
+              <a:spcBef>
+                <a:spcPts val="0"/>
+              </a:spcBef>
+              <a:spcAft>
+                <a:spcPts val="0"/>
+              </a:spcAft>
+              <a:buNone/>
+            </a:pPr>
+            <a:r>
+              <a:rPr b="1" i="0" lang="en-US" sz="3150" u="none" cap="none" strike="noStrike">
+                <a:solidFill>
+                  <a:srgbClr val="0D9488"/>
+                </a:solidFill>
+                <a:latin typeface="Poppins"/>
+                <a:ea typeface="Poppins"/>
+                <a:cs typeface="Poppins"/>
+                <a:sym typeface="Poppins"/>
+              </a:rPr>
+              <a:t>Exemplo: Reconhecendo {aⁿbⁿcⁿ}</a:t>
+            </a:r>
+            <a:endParaRPr/>
+          </a:p>
+        </p:txBody>
+      </p:sp>
+      <p:sp>
+        <p:nvSpPr>
+          <p:cNvPr id="234" name="Google Shape;234;p22"/>
+          <p:cNvSpPr/>
+          <p:nvPr/>
+        </p:nvSpPr>
+        <p:spPr>
+          <a:xfrm>
+            <a:off x="1691580" y="3776662"/>
+            <a:ext cx="190500" cy="190500"/>
+          </a:xfrm>
+          <a:prstGeom prst="roundRect">
+            <a:avLst>
+              <a:gd fmla="val 50000" name="adj"/>
+            </a:avLst>
+          </a:prstGeom>
+          <a:solidFill>
+            <a:srgbClr val="0D9488"/>
+          </a:solidFill>
+          <a:ln cap="flat" cmpd="sng" w="38100">
+            <a:solidFill>
+              <a:srgbClr val="FFFFFF"/>
+            </a:solidFill>
+            <a:prstDash val="solid"/>
+            <a:round/>
+            <a:headEnd len="sm" w="sm" type="none"/>
+            <a:tailEnd len="sm" w="sm" type="none"/>
+          </a:ln>
+        </p:spPr>
+        <p:txBody>
+          <a:bodyPr anchorCtr="0" anchor="ctr" bIns="45700" lIns="91425" spcFirstLastPara="1" rIns="91425" wrap="square" tIns="45700">
+            <a:noAutofit/>
+          </a:bodyPr>
+          <a:lstStyle/>
+          <a:p>
+            <a:pPr indent="0" lvl="0" marL="0" marR="0" rtl="0" algn="ctr">
+              <a:spcBef>
+                <a:spcPts val="0"/>
+              </a:spcBef>
+              <a:spcAft>
+                <a:spcPts val="0"/>
+              </a:spcAft>
+              <a:buNone/>
+            </a:pPr>
+            <a:r>
+              <a:t/>
+            </a:r>
+            <a:endParaRPr b="0" i="0" sz="1800" u="none" cap="none" strike="noStrike">
+              <a:solidFill>
+                <a:schemeClr val="dk1"/>
+              </a:solidFill>
+              <a:latin typeface="Calibri"/>
+              <a:ea typeface="Calibri"/>
+              <a:cs typeface="Calibri"/>
+              <a:sym typeface="Calibri"/>
+            </a:endParaRPr>
+          </a:p>
+        </p:txBody>
+      </p:sp>
+      <p:sp>
+        <p:nvSpPr>
+          <p:cNvPr id="235" name="Google Shape;235;p22"/>
+          <p:cNvSpPr/>
+          <p:nvPr/>
+        </p:nvSpPr>
+        <p:spPr>
+          <a:xfrm>
+            <a:off x="4564260" y="3776662"/>
+            <a:ext cx="190500" cy="190500"/>
+          </a:xfrm>
+          <a:prstGeom prst="roundRect">
+            <a:avLst>
+              <a:gd fmla="val 50000" name="adj"/>
+            </a:avLst>
+          </a:prstGeom>
+          <a:solidFill>
+            <a:srgbClr val="0D9488"/>
+          </a:solidFill>
+          <a:ln cap="flat" cmpd="sng" w="38100">
+            <a:solidFill>
+              <a:srgbClr val="FFFFFF"/>
+            </a:solidFill>
+            <a:prstDash val="solid"/>
+            <a:round/>
+            <a:headEnd len="sm" w="sm" type="none"/>
+            <a:tailEnd len="sm" w="sm" type="none"/>
+          </a:ln>
+        </p:spPr>
+        <p:txBody>
+          <a:bodyPr anchorCtr="0" anchor="ctr" bIns="45700" lIns="91425" spcFirstLastPara="1" rIns="91425" wrap="square" tIns="45700">
+            <a:noAutofit/>
+          </a:bodyPr>
+          <a:lstStyle/>
+          <a:p>
+            <a:pPr indent="0" lvl="0" marL="0" marR="0" rtl="0" algn="ctr">
+              <a:spcBef>
+                <a:spcPts val="0"/>
+              </a:spcBef>
+              <a:spcAft>
+                <a:spcPts val="0"/>
+              </a:spcAft>
+              <a:buNone/>
+            </a:pPr>
+            <a:r>
+              <a:t/>
+            </a:r>
+            <a:endParaRPr b="0" i="0" sz="1800" u="none" cap="none" strike="noStrike">
+              <a:solidFill>
+                <a:schemeClr val="dk1"/>
+              </a:solidFill>
+              <a:latin typeface="Calibri"/>
+              <a:ea typeface="Calibri"/>
+              <a:cs typeface="Calibri"/>
+              <a:sym typeface="Calibri"/>
+            </a:endParaRPr>
+          </a:p>
+        </p:txBody>
+      </p:sp>
+      <p:sp>
+        <p:nvSpPr>
+          <p:cNvPr id="236" name="Google Shape;236;p22"/>
+          <p:cNvSpPr/>
+          <p:nvPr/>
+        </p:nvSpPr>
+        <p:spPr>
+          <a:xfrm>
+            <a:off x="7436941" y="3776662"/>
+            <a:ext cx="190500" cy="190500"/>
+          </a:xfrm>
+          <a:prstGeom prst="roundRect">
+            <a:avLst>
+              <a:gd fmla="val 50000" name="adj"/>
+            </a:avLst>
+          </a:prstGeom>
+          <a:solidFill>
+            <a:srgbClr val="0D9488"/>
+          </a:solidFill>
+          <a:ln cap="flat" cmpd="sng" w="38100">
+            <a:solidFill>
+              <a:srgbClr val="FFFFFF"/>
+            </a:solidFill>
+            <a:prstDash val="solid"/>
+            <a:round/>
+            <a:headEnd len="sm" w="sm" type="none"/>
+            <a:tailEnd len="sm" w="sm" type="none"/>
+          </a:ln>
+        </p:spPr>
+        <p:txBody>
+          <a:bodyPr anchorCtr="0" anchor="ctr" bIns="45700" lIns="91425" spcFirstLastPara="1" rIns="91425" wrap="square" tIns="45700">
+            <a:noAutofit/>
+          </a:bodyPr>
+          <a:lstStyle/>
+          <a:p>
+            <a:pPr indent="0" lvl="0" marL="0" marR="0" rtl="0" algn="ctr">
+              <a:spcBef>
+                <a:spcPts val="0"/>
+              </a:spcBef>
+              <a:spcAft>
+                <a:spcPts val="0"/>
+              </a:spcAft>
+              <a:buNone/>
+            </a:pPr>
+            <a:r>
+              <a:t/>
+            </a:r>
+            <a:endParaRPr b="0" i="0" sz="1800" u="none" cap="none" strike="noStrike">
+              <a:solidFill>
+                <a:schemeClr val="dk1"/>
+              </a:solidFill>
+              <a:latin typeface="Calibri"/>
+              <a:ea typeface="Calibri"/>
+              <a:cs typeface="Calibri"/>
+              <a:sym typeface="Calibri"/>
+            </a:endParaRPr>
+          </a:p>
+        </p:txBody>
+      </p:sp>
+      <p:sp>
+        <p:nvSpPr>
+          <p:cNvPr id="237" name="Google Shape;237;p22"/>
+          <p:cNvSpPr/>
+          <p:nvPr/>
+        </p:nvSpPr>
+        <p:spPr>
+          <a:xfrm>
+            <a:off x="10309621" y="3776662"/>
+            <a:ext cx="190500" cy="190500"/>
+          </a:xfrm>
+          <a:prstGeom prst="roundRect">
+            <a:avLst>
+              <a:gd fmla="val 50000" name="adj"/>
+            </a:avLst>
+          </a:prstGeom>
+          <a:solidFill>
+            <a:srgbClr val="0D9488"/>
+          </a:solidFill>
+          <a:ln cap="flat" cmpd="sng" w="38100">
+            <a:solidFill>
+              <a:srgbClr val="FFFFFF"/>
+            </a:solidFill>
+            <a:prstDash val="solid"/>
+            <a:round/>
+            <a:headEnd len="sm" w="sm" type="none"/>
+            <a:tailEnd len="sm" w="sm" type="none"/>
+          </a:ln>
+        </p:spPr>
+        <p:txBody>
+          <a:bodyPr anchorCtr="0" anchor="ctr" bIns="45700" lIns="91425" spcFirstLastPara="1" rIns="91425" wrap="square" tIns="45700">
+            <a:noAutofit/>
+          </a:bodyPr>
+          <a:lstStyle/>
+          <a:p>
+            <a:pPr indent="0" lvl="0" marL="0" marR="0" rtl="0" algn="ctr">
+              <a:spcBef>
+                <a:spcPts val="0"/>
+              </a:spcBef>
+              <a:spcAft>
+                <a:spcPts val="0"/>
+              </a:spcAft>
+              <a:buNone/>
+            </a:pPr>
+            <a:r>
+              <a:t/>
+            </a:r>
+            <a:endParaRPr b="0" i="0" sz="1800" u="none" cap="none" strike="noStrike">
+              <a:solidFill>
+                <a:schemeClr val="dk1"/>
+              </a:solidFill>
+              <a:latin typeface="Calibri"/>
+              <a:ea typeface="Calibri"/>
+              <a:cs typeface="Calibri"/>
+              <a:sym typeface="Calibri"/>
+            </a:endParaRPr>
+          </a:p>
+        </p:txBody>
+      </p:sp>
+    </p:spTree>
+  </p:cSld>
+  <p:clrMapOvr>
+    <a:masterClrMapping/>
+  </p:clrMapOvr>
+</p:sld>
+</file>
+
+<file path=ppt/slides/slide11.xml><?xml version="1.0" encoding="utf-8"?>
+<p:sld xmlns:a="http://schemas.openxmlformats.org/drawingml/2006/main" xmlns:r="http://schemas.openxmlformats.org/officeDocument/2006/relationships" xmlns:mc="http://schemas.openxmlformats.org/markup-compatibility/2006" xmlns:mv="urn:schemas-microsoft-com:mac:vml" xmlns:p="http://schemas.openxmlformats.org/presentationml/2006/main" xmlns:c="http://schemas.openxmlformats.org/drawingml/2006/chart" xmlns:dgm="http://schemas.openxmlformats.org/drawingml/2006/diagram" xmlns:o="urn:schemas-microsoft-com:office:office" xmlns:v="urn:schemas-microsoft-com:vml" xmlns:pvml="urn:schemas-microsoft-com:office:powerpoint" xmlns:com="http://schemas.openxmlformats.org/drawingml/2006/compatibility" xmlns:p14="http://schemas.microsoft.com/office/powerpoint/2010/main" xmlns:p15="http://schemas.microsoft.com/office/powerpoint/2012/main" xmlns:ahyp="http://schemas.microsoft.com/office/drawing/2018/hyperlinkcolor">
+  <p:cSld>
+    <p:bg>
+      <p:bgPr>
+        <a:solidFill>
+          <a:srgbClr val="FFFFFF"/>
+        </a:solidFill>
+      </p:bgPr>
+    </p:bg>
+    <p:spTree>
+      <p:nvGrpSpPr>
+        <p:cNvPr id="241" name="Shape 241"/>
+        <p:cNvGrpSpPr/>
+        <p:nvPr/>
+      </p:nvGrpSpPr>
+      <p:grpSpPr>
+        <a:xfrm>
+          <a:off x="0" y="0"/>
+          <a:ext cx="0" cy="0"/>
+          <a:chOff x="0" y="0"/>
+          <a:chExt cx="0" cy="0"/>
+        </a:xfrm>
+      </p:grpSpPr>
+      <p:pic>
+        <p:nvPicPr>
+          <p:cNvPr descr="image.png" id="242" name="Google Shape;242;p23"/>
+          <p:cNvPicPr preferRelativeResize="0"/>
+          <p:nvPr/>
+        </p:nvPicPr>
+        <p:blipFill rotWithShape="1">
+          <a:blip r:embed="rId3">
+            <a:alphaModFix/>
+          </a:blip>
+          <a:srcRect b="0" l="0" r="0" t="0"/>
+          <a:stretch/>
+        </p:blipFill>
+        <p:spPr>
+          <a:xfrm>
+            <a:off x="0" y="0"/>
+            <a:ext cx="12192000" cy="6858000"/>
+          </a:xfrm>
+          <a:prstGeom prst="rect">
+            <a:avLst/>
+          </a:prstGeom>
+          <a:noFill/>
+          <a:ln>
+            <a:noFill/>
+          </a:ln>
+        </p:spPr>
+      </p:pic>
+      <p:sp>
+        <p:nvSpPr>
+          <p:cNvPr id="243" name="Google Shape;243;p23"/>
           <p:cNvSpPr txBox="1"/>
           <p:nvPr/>
         </p:nvSpPr>
@@ -11777,7 +12685,7 @@
       </p:sp>
       <p:sp>
         <p:nvSpPr>
-          <p:cNvPr id="225" name="Google Shape;225;p22"/>
+          <p:cNvPr id="244" name="Google Shape;244;p23"/>
           <p:cNvSpPr txBox="1"/>
           <p:nvPr/>
         </p:nvSpPr>
@@ -11854,7 +12762,7 @@
       </p:sp>
       <p:sp>
         <p:nvSpPr>
-          <p:cNvPr id="226" name="Google Shape;226;p22"/>
+          <p:cNvPr id="245" name="Google Shape;245;p23"/>
           <p:cNvSpPr txBox="1"/>
           <p:nvPr/>
         </p:nvSpPr>
@@ -11907,7 +12815,7 @@
       </p:sp>
       <p:sp>
         <p:nvSpPr>
-          <p:cNvPr id="227" name="Google Shape;227;p22"/>
+          <p:cNvPr id="246" name="Google Shape;246;p23"/>
           <p:cNvSpPr txBox="1"/>
           <p:nvPr/>
         </p:nvSpPr>
@@ -11957,7 +12865,7 @@
       </p:sp>
       <p:pic>
         <p:nvPicPr>
-          <p:cNvPr id="228" name="Google Shape;228;p22"/>
+          <p:cNvPr id="247" name="Google Shape;247;p23"/>
           <p:cNvPicPr preferRelativeResize="0"/>
           <p:nvPr/>
         </p:nvPicPr>
@@ -11991,7 +12899,7 @@
 </p:sld>
 </file>
 
-<file path=ppt/slides/slide11.xml><?xml version="1.0" encoding="utf-8"?>
+<file path=ppt/slides/slide12.xml><?xml version="1.0" encoding="utf-8"?>
 <p:sld xmlns:a="http://schemas.openxmlformats.org/drawingml/2006/main" xmlns:r="http://schemas.openxmlformats.org/officeDocument/2006/relationships" xmlns:mc="http://schemas.openxmlformats.org/markup-compatibility/2006" xmlns:mv="urn:schemas-microsoft-com:mac:vml" xmlns:p="http://schemas.openxmlformats.org/presentationml/2006/main" xmlns:c="http://schemas.openxmlformats.org/drawingml/2006/chart" xmlns:dgm="http://schemas.openxmlformats.org/drawingml/2006/diagram" xmlns:o="urn:schemas-microsoft-com:office:office" xmlns:v="urn:schemas-microsoft-com:vml" xmlns:pvml="urn:schemas-microsoft-com:office:powerpoint" xmlns:com="http://schemas.openxmlformats.org/drawingml/2006/compatibility" xmlns:p14="http://schemas.microsoft.com/office/powerpoint/2010/main" xmlns:p15="http://schemas.microsoft.com/office/powerpoint/2012/main" xmlns:ahyp="http://schemas.microsoft.com/office/drawing/2018/hyperlinkcolor">
   <p:cSld>
     <p:bg>
@@ -12003,7 +12911,7 @@
     </p:bg>
     <p:spTree>
       <p:nvGrpSpPr>
-        <p:cNvPr id="232" name="Shape 232"/>
+        <p:cNvPr id="251" name="Shape 251"/>
         <p:cNvGrpSpPr/>
         <p:nvPr/>
       </p:nvGrpSpPr>
@@ -12017,7 +12925,7 @@
       </p:grpSpPr>
       <p:pic>
         <p:nvPicPr>
-          <p:cNvPr descr="image.png" id="233" name="Google Shape;233;p23"/>
+          <p:cNvPr descr="image.png" id="252" name="Google Shape;252;p24"/>
           <p:cNvPicPr preferRelativeResize="0"/>
           <p:nvPr/>
         </p:nvPicPr>
@@ -12044,7 +12952,7 @@
       </p:pic>
       <p:pic>
         <p:nvPicPr>
-          <p:cNvPr descr="image.png" id="234" name="Google Shape;234;p23"/>
+          <p:cNvPr descr="image.png" id="253" name="Google Shape;253;p24"/>
           <p:cNvPicPr preferRelativeResize="0"/>
           <p:nvPr/>
         </p:nvPicPr>
@@ -12071,7 +12979,7 @@
       </p:pic>
       <p:sp>
         <p:nvSpPr>
-          <p:cNvPr id="235" name="Google Shape;235;p23"/>
+          <p:cNvPr id="254" name="Google Shape;254;p24"/>
           <p:cNvSpPr txBox="1"/>
           <p:nvPr/>
         </p:nvSpPr>
@@ -12121,7 +13029,7 @@
       </p:sp>
       <p:sp>
         <p:nvSpPr>
-          <p:cNvPr id="236" name="Google Shape;236;p23"/>
+          <p:cNvPr id="255" name="Google Shape;255;p24"/>
           <p:cNvSpPr txBox="1"/>
           <p:nvPr/>
         </p:nvSpPr>
@@ -13023,35 +13931,8 @@
         </p:blipFill>
         <p:spPr>
           <a:xfrm>
-            <a:off x="571500" y="2124075"/>
-            <a:ext cx="5238750" cy="2714625"/>
-          </a:xfrm>
-          <a:prstGeom prst="rect">
-            <a:avLst/>
-          </a:prstGeom>
-          <a:noFill/>
-          <a:ln>
-            <a:noFill/>
-          </a:ln>
-        </p:spPr>
-      </p:pic>
-      <p:pic>
-        <p:nvPicPr>
-          <p:cNvPr descr="image.png" id="114" name="Google Shape;114;p16"/>
-          <p:cNvPicPr preferRelativeResize="0"/>
-          <p:nvPr/>
-        </p:nvPicPr>
-        <p:blipFill rotWithShape="1">
-          <a:blip r:embed="rId5">
-            <a:alphaModFix/>
-          </a:blip>
-          <a:srcRect b="0" l="0" r="0" t="0"/>
-          <a:stretch/>
-        </p:blipFill>
-        <p:spPr>
-          <a:xfrm>
-            <a:off x="6381750" y="2124075"/>
-            <a:ext cx="5238750" cy="2714625"/>
+            <a:off x="6334125" y="2224087"/>
+            <a:ext cx="5286375" cy="3333750"/>
           </a:xfrm>
           <a:prstGeom prst="rect">
             <a:avLst/>
@@ -13064,14 +13945,14 @@
       </p:pic>
       <p:sp>
         <p:nvSpPr>
-          <p:cNvPr id="115" name="Google Shape;115;p16"/>
+          <p:cNvPr id="114" name="Google Shape;114;p16"/>
           <p:cNvSpPr txBox="1"/>
           <p:nvPr/>
         </p:nvSpPr>
         <p:spPr>
           <a:xfrm>
-            <a:off x="571500" y="5124450"/>
-            <a:ext cx="11049000" cy="304800"/>
+            <a:off x="571500" y="2324100"/>
+            <a:ext cx="5550600" cy="323100"/>
           </a:xfrm>
           <a:prstGeom prst="rect">
             <a:avLst/>
@@ -13087,10 +13968,7 @@
           </a:bodyPr>
           <a:lstStyle/>
           <a:p>
-            <a:pPr indent="0" lvl="0" marL="0" marR="0" rtl="0" algn="ctr">
-              <a:lnSpc>
-                <a:spcPct val="160000"/>
-              </a:lnSpc>
+            <a:pPr indent="0" lvl="0" marL="0" marR="0" rtl="0" algn="l">
               <a:spcBef>
                 <a:spcPts val="0"/>
               </a:spcBef>
@@ -13100,21 +13978,48 @@
               <a:buNone/>
             </a:pPr>
             <a:r>
-              <a:rPr b="1" i="0" lang="en-US" sz="1500" u="none" cap="none" strike="noStrike">
+              <a:rPr b="1" i="0" lang="en-US" sz="2100" u="none" cap="none" strike="noStrike">
                 <a:solidFill>
-                  <a:srgbClr val="0D9488"/>
+                  <a:srgbClr val="0F172A"/>
                 </a:solidFill>
-                <a:latin typeface="Lato"/>
-                <a:ea typeface="Lato"/>
-                <a:cs typeface="Lato"/>
-                <a:sym typeface="Lato"/>
+                <a:latin typeface="Poppins"/>
+                <a:ea typeface="Poppins"/>
+                <a:cs typeface="Poppins"/>
+                <a:sym typeface="Poppins"/>
               </a:rPr>
-              <a:t>A junção das duas pilhas simula perfeitamente uma fita bidirecional infinita.</a:t>
+              <a:t>O Modelo de Base</a:t>
             </a:r>
             <a:endParaRPr/>
           </a:p>
         </p:txBody>
       </p:sp>
+      <p:pic>
+        <p:nvPicPr>
+          <p:cNvPr descr="image.png" id="115" name="Google Shape;115;p16"/>
+          <p:cNvPicPr preferRelativeResize="0"/>
+          <p:nvPr/>
+        </p:nvPicPr>
+        <p:blipFill rotWithShape="1">
+          <a:blip r:embed="rId5">
+            <a:alphaModFix/>
+          </a:blip>
+          <a:srcRect b="0" l="0" r="0" t="0"/>
+          <a:stretch/>
+        </p:blipFill>
+        <p:spPr>
+          <a:xfrm>
+            <a:off x="6343650" y="2233612"/>
+            <a:ext cx="5267325" cy="3314700"/>
+          </a:xfrm>
+          <a:prstGeom prst="rect">
+            <a:avLst/>
+          </a:prstGeom>
+          <a:noFill/>
+          <a:ln>
+            <a:noFill/>
+          </a:ln>
+        </p:spPr>
+      </p:pic>
       <p:sp>
         <p:nvSpPr>
           <p:cNvPr id="116" name="Google Shape;116;p16"/>
@@ -13123,8 +14028,8 @@
         </p:nvSpPr>
         <p:spPr>
           <a:xfrm>
-            <a:off x="750570" y="3152775"/>
-            <a:ext cx="4880610" cy="400050"/>
+            <a:off x="952500" y="2876550"/>
+            <a:ext cx="4905300" cy="577200"/>
           </a:xfrm>
           <a:prstGeom prst="rect">
             <a:avLst/>
@@ -13140,7 +14045,10 @@
           </a:bodyPr>
           <a:lstStyle/>
           <a:p>
-            <a:pPr indent="0" lvl="0" marL="0" marR="0" rtl="0" algn="ctr">
+            <a:pPr indent="0" lvl="0" marL="0" marR="0" rtl="0" algn="l">
+              <a:lnSpc>
+                <a:spcPct val="150000"/>
+              </a:lnSpc>
               <a:spcBef>
                 <a:spcPts val="0"/>
               </a:spcBef>
@@ -13150,16 +14058,28 @@
               <a:buNone/>
             </a:pPr>
             <a:r>
-              <a:rPr b="1" i="0" lang="en-US" sz="2100" u="none" cap="none" strike="noStrike">
+              <a:rPr b="1" i="0" lang="en-US" sz="1500" u="none" cap="none" strike="noStrike">
                 <a:solidFill>
-                  <a:srgbClr val="1E293B"/>
+                  <a:srgbClr val="334155"/>
                 </a:solidFill>
-                <a:latin typeface="Poppins"/>
-                <a:ea typeface="Poppins"/>
-                <a:cs typeface="Poppins"/>
-                <a:sym typeface="Poppins"/>
+                <a:latin typeface="Lato"/>
+                <a:ea typeface="Lato"/>
+                <a:cs typeface="Lato"/>
+                <a:sym typeface="Lato"/>
               </a:rPr>
-              <a:t>Pilha da Esquerda</a:t>
+              <a:t>Sem Memória Externa:</a:t>
+            </a:r>
+            <a:r>
+              <a:rPr b="0" i="0" lang="en-US" sz="1500" u="none" cap="none" strike="noStrike">
+                <a:solidFill>
+                  <a:srgbClr val="334155"/>
+                </a:solidFill>
+                <a:latin typeface="Lato"/>
+                <a:ea typeface="Lato"/>
+                <a:cs typeface="Lato"/>
+                <a:sym typeface="Lato"/>
+              </a:rPr>
+              <a:t> A memória é restrita apenas ao estado atual.</a:t>
             </a:r>
             <a:endParaRPr/>
           </a:p>
@@ -13173,8 +14093,8 @@
         </p:nvSpPr>
         <p:spPr>
           <a:xfrm>
-            <a:off x="866775" y="3743325"/>
-            <a:ext cx="4648200" cy="609600"/>
+            <a:off x="952500" y="3590925"/>
+            <a:ext cx="4905300" cy="577200"/>
           </a:xfrm>
           <a:prstGeom prst="rect">
             <a:avLst/>
@@ -13190,9 +14110,9 @@
           </a:bodyPr>
           <a:lstStyle/>
           <a:p>
-            <a:pPr indent="0" lvl="0" marL="0" marR="0" rtl="0" algn="ctr">
+            <a:pPr indent="0" lvl="0" marL="0" marR="0" rtl="0" algn="l">
               <a:lnSpc>
-                <a:spcPct val="160000"/>
+                <a:spcPct val="150000"/>
               </a:lnSpc>
               <a:spcBef>
                 <a:spcPts val="0"/>
@@ -13203,16 +14123,28 @@
               <a:buNone/>
             </a:pPr>
             <a:r>
-              <a:rPr b="0" i="0" lang="en-US" sz="1500" u="none" cap="none" strike="noStrike">
+              <a:rPr b="1" i="0" lang="en-US" sz="1500" u="none" cap="none" strike="noStrike">
                 <a:solidFill>
-                  <a:srgbClr val="475569"/>
+                  <a:srgbClr val="334155"/>
                 </a:solidFill>
                 <a:latin typeface="Lato"/>
                 <a:ea typeface="Lato"/>
                 <a:cs typeface="Lato"/>
                 <a:sym typeface="Lato"/>
               </a:rPr>
-              <a:t>Armazena todos os símbolos à esquerda da cabeça de leitura, com o símbolo mais próximo no topo.</a:t>
+              <a:t>Linguagens Regulares:</a:t>
+            </a:r>
+            <a:r>
+              <a:rPr b="0" i="0" lang="en-US" sz="1500" u="none" cap="none" strike="noStrike">
+                <a:solidFill>
+                  <a:srgbClr val="334155"/>
+                </a:solidFill>
+                <a:latin typeface="Lato"/>
+                <a:ea typeface="Lato"/>
+                <a:cs typeface="Lato"/>
+                <a:sym typeface="Lato"/>
+              </a:rPr>
+              <a:t> Reconhece padrões simples (Expressões Regulares).</a:t>
             </a:r>
             <a:endParaRPr/>
           </a:p>
@@ -13226,8 +14158,8 @@
         </p:nvSpPr>
         <p:spPr>
           <a:xfrm>
-            <a:off x="6560820" y="3152775"/>
-            <a:ext cx="4880610" cy="400050"/>
+            <a:off x="952500" y="4305300"/>
+            <a:ext cx="4905300" cy="577200"/>
           </a:xfrm>
           <a:prstGeom prst="rect">
             <a:avLst/>
@@ -13243,7 +14175,10 @@
           </a:bodyPr>
           <a:lstStyle/>
           <a:p>
-            <a:pPr indent="0" lvl="0" marL="0" marR="0" rtl="0" algn="ctr">
+            <a:pPr indent="0" lvl="0" marL="0" marR="0" rtl="0" algn="l">
+              <a:lnSpc>
+                <a:spcPct val="150000"/>
+              </a:lnSpc>
               <a:spcBef>
                 <a:spcPts val="0"/>
               </a:spcBef>
@@ -13253,16 +14188,28 @@
               <a:buNone/>
             </a:pPr>
             <a:r>
-              <a:rPr b="1" i="0" lang="en-US" sz="2100" u="none" cap="none" strike="noStrike">
+              <a:rPr b="1" i="0" lang="en-US" sz="1500" u="none" cap="none" strike="noStrike">
                 <a:solidFill>
-                  <a:srgbClr val="1E293B"/>
+                  <a:srgbClr val="334155"/>
                 </a:solidFill>
-                <a:latin typeface="Poppins"/>
-                <a:ea typeface="Poppins"/>
-                <a:cs typeface="Poppins"/>
-                <a:sym typeface="Poppins"/>
+                <a:latin typeface="Lato"/>
+                <a:ea typeface="Lato"/>
+                <a:cs typeface="Lato"/>
+                <a:sym typeface="Lato"/>
               </a:rPr>
-              <a:t>Pilha da Direita</a:t>
+              <a:t>Componentes:</a:t>
+            </a:r>
+            <a:r>
+              <a:rPr b="0" i="0" lang="en-US" sz="1500" u="none" cap="none" strike="noStrike">
+                <a:solidFill>
+                  <a:srgbClr val="334155"/>
+                </a:solidFill>
+                <a:latin typeface="Lato"/>
+                <a:ea typeface="Lato"/>
+                <a:cs typeface="Lato"/>
+                <a:sym typeface="Lato"/>
+              </a:rPr>
+              <a:t> Definida por Estados (Q), Alfabeto (Σ) e Transições (δ).</a:t>
             </a:r>
             <a:endParaRPr/>
           </a:p>
@@ -13276,8 +14223,8 @@
         </p:nvSpPr>
         <p:spPr>
           <a:xfrm>
-            <a:off x="6677025" y="3743325"/>
-            <a:ext cx="4648200" cy="609600"/>
+            <a:off x="952500" y="5019675"/>
+            <a:ext cx="4905300" cy="231000"/>
           </a:xfrm>
           <a:prstGeom prst="rect">
             <a:avLst/>
@@ -13293,9 +14240,9 @@
           </a:bodyPr>
           <a:lstStyle/>
           <a:p>
-            <a:pPr indent="0" lvl="0" marL="0" marR="0" rtl="0" algn="ctr">
+            <a:pPr indent="0" lvl="0" marL="0" marR="0" rtl="0" algn="l">
               <a:lnSpc>
-                <a:spcPct val="160000"/>
+                <a:spcPct val="150000"/>
               </a:lnSpc>
               <a:spcBef>
                 <a:spcPts val="0"/>
@@ -13306,16 +14253,28 @@
               <a:buNone/>
             </a:pPr>
             <a:r>
-              <a:rPr b="0" i="0" lang="en-US" sz="1500" u="none" cap="none" strike="noStrike">
+              <a:rPr b="1" i="0" lang="en-US" sz="1500" u="none" cap="none" strike="noStrike">
                 <a:solidFill>
-                  <a:srgbClr val="475569"/>
+                  <a:srgbClr val="334155"/>
                 </a:solidFill>
                 <a:latin typeface="Lato"/>
                 <a:ea typeface="Lato"/>
                 <a:cs typeface="Lato"/>
                 <a:sym typeface="Lato"/>
               </a:rPr>
-              <a:t>Armazena o símbolo sob a cabeça de leitura e todos os símbolos à sua direita na fita.</a:t>
+              <a:t>Limitação:</a:t>
+            </a:r>
+            <a:r>
+              <a:rPr b="0" i="0" lang="en-US" sz="1500" u="none" cap="none" strike="noStrike">
+                <a:solidFill>
+                  <a:srgbClr val="334155"/>
+                </a:solidFill>
+                <a:latin typeface="Lato"/>
+                <a:ea typeface="Lato"/>
+                <a:cs typeface="Lato"/>
+                <a:sym typeface="Lato"/>
+              </a:rPr>
+              <a:t> Não consegue contar infinitamente (ex:           ).</a:t>
             </a:r>
             <a:endParaRPr/>
           </a:p>
@@ -13336,8 +14295,8 @@
         </p:blipFill>
         <p:spPr>
           <a:xfrm>
-            <a:off x="2933700" y="2466975"/>
-            <a:ext cx="514350" cy="457200"/>
+            <a:off x="5137625" y="5074806"/>
+            <a:ext cx="391269" cy="156418"/>
           </a:xfrm>
           <a:prstGeom prst="rect">
             <a:avLst/>
@@ -13363,8 +14322,89 @@
         </p:blipFill>
         <p:spPr>
           <a:xfrm>
-            <a:off x="8801100" y="2466975"/>
-            <a:ext cx="400050" cy="457200"/>
+            <a:off x="571500" y="2909887"/>
+            <a:ext cx="190500" cy="200025"/>
+          </a:xfrm>
+          <a:prstGeom prst="rect">
+            <a:avLst/>
+          </a:prstGeom>
+          <a:noFill/>
+          <a:ln>
+            <a:noFill/>
+          </a:ln>
+        </p:spPr>
+      </p:pic>
+      <p:pic>
+        <p:nvPicPr>
+          <p:cNvPr descr="image.png" id="122" name="Google Shape;122;p16"/>
+          <p:cNvPicPr preferRelativeResize="0"/>
+          <p:nvPr/>
+        </p:nvPicPr>
+        <p:blipFill rotWithShape="1">
+          <a:blip r:embed="rId8">
+            <a:alphaModFix/>
+          </a:blip>
+          <a:srcRect b="0" l="0" r="0" t="0"/>
+          <a:stretch/>
+        </p:blipFill>
+        <p:spPr>
+          <a:xfrm>
+            <a:off x="571500" y="3624262"/>
+            <a:ext cx="238125" cy="200025"/>
+          </a:xfrm>
+          <a:prstGeom prst="rect">
+            <a:avLst/>
+          </a:prstGeom>
+          <a:noFill/>
+          <a:ln>
+            <a:noFill/>
+          </a:ln>
+        </p:spPr>
+      </p:pic>
+      <p:pic>
+        <p:nvPicPr>
+          <p:cNvPr descr="image.png" id="123" name="Google Shape;123;p16"/>
+          <p:cNvPicPr preferRelativeResize="0"/>
+          <p:nvPr/>
+        </p:nvPicPr>
+        <p:blipFill rotWithShape="1">
+          <a:blip r:embed="rId9">
+            <a:alphaModFix/>
+          </a:blip>
+          <a:srcRect b="0" l="0" r="0" t="0"/>
+          <a:stretch/>
+        </p:blipFill>
+        <p:spPr>
+          <a:xfrm>
+            <a:off x="571500" y="4338637"/>
+            <a:ext cx="190500" cy="200025"/>
+          </a:xfrm>
+          <a:prstGeom prst="rect">
+            <a:avLst/>
+          </a:prstGeom>
+          <a:noFill/>
+          <a:ln>
+            <a:noFill/>
+          </a:ln>
+        </p:spPr>
+      </p:pic>
+      <p:pic>
+        <p:nvPicPr>
+          <p:cNvPr descr="image.png" id="124" name="Google Shape;124;p16"/>
+          <p:cNvPicPr preferRelativeResize="0"/>
+          <p:nvPr/>
+        </p:nvPicPr>
+        <p:blipFill rotWithShape="1">
+          <a:blip r:embed="rId10">
+            <a:alphaModFix/>
+          </a:blip>
+          <a:srcRect b="0" l="0" r="0" t="0"/>
+          <a:stretch/>
+        </p:blipFill>
+        <p:spPr>
+          <a:xfrm>
+            <a:off x="571500" y="5053012"/>
+            <a:ext cx="190500" cy="200025"/>
           </a:xfrm>
           <a:prstGeom prst="rect">
             <a:avLst/>
@@ -13377,7 +14417,534 @@
       </p:pic>
       <p:sp>
         <p:nvSpPr>
-          <p:cNvPr id="122" name="Google Shape;122;p16"/>
+          <p:cNvPr id="125" name="Google Shape;125;p16"/>
+          <p:cNvSpPr txBox="1"/>
+          <p:nvPr/>
+        </p:nvSpPr>
+        <p:spPr>
+          <a:xfrm>
+            <a:off x="762000" y="571500"/>
+            <a:ext cx="11401500" cy="438600"/>
+          </a:xfrm>
+          <a:prstGeom prst="rect">
+            <a:avLst/>
+          </a:prstGeom>
+          <a:noFill/>
+          <a:ln>
+            <a:noFill/>
+          </a:ln>
+        </p:spPr>
+        <p:txBody>
+          <a:bodyPr anchorCtr="0" anchor="t" bIns="0" lIns="0" spcFirstLastPara="1" rIns="0" wrap="square" tIns="0">
+            <a:spAutoFit/>
+          </a:bodyPr>
+          <a:lstStyle/>
+          <a:p>
+            <a:pPr indent="0" lvl="0" marL="0" marR="0" rtl="0" algn="l">
+              <a:spcBef>
+                <a:spcPts val="0"/>
+              </a:spcBef>
+              <a:spcAft>
+                <a:spcPts val="0"/>
+              </a:spcAft>
+              <a:buNone/>
+            </a:pPr>
+            <a:r>
+              <a:rPr b="1" i="0" lang="en-US" sz="2850" u="none" cap="none" strike="noStrike">
+                <a:solidFill>
+                  <a:srgbClr val="0D9488"/>
+                </a:solidFill>
+                <a:latin typeface="Poppins"/>
+                <a:ea typeface="Poppins"/>
+                <a:cs typeface="Poppins"/>
+                <a:sym typeface="Poppins"/>
+              </a:rPr>
+              <a:t>Máquina de Estados Finitos (FSM)</a:t>
+            </a:r>
+            <a:endParaRPr/>
+          </a:p>
+        </p:txBody>
+      </p:sp>
+      <p:sp>
+        <p:nvSpPr>
+          <p:cNvPr id="126" name="Google Shape;126;p16"/>
+          <p:cNvSpPr/>
+          <p:nvPr/>
+        </p:nvSpPr>
+        <p:spPr>
+          <a:xfrm>
+            <a:off x="571500" y="571500"/>
+            <a:ext cx="76200" cy="543000"/>
+          </a:xfrm>
+          <a:prstGeom prst="rect">
+            <a:avLst/>
+          </a:prstGeom>
+          <a:solidFill>
+            <a:srgbClr val="0D9488"/>
+          </a:solidFill>
+          <a:ln>
+            <a:noFill/>
+          </a:ln>
+        </p:spPr>
+        <p:txBody>
+          <a:bodyPr anchorCtr="0" anchor="ctr" bIns="45700" lIns="91425" spcFirstLastPara="1" rIns="91425" wrap="square" tIns="45700">
+            <a:noAutofit/>
+          </a:bodyPr>
+          <a:lstStyle/>
+          <a:p>
+            <a:pPr indent="0" lvl="0" marL="0" marR="0" rtl="0" algn="ctr">
+              <a:spcBef>
+                <a:spcPts val="0"/>
+              </a:spcBef>
+              <a:spcAft>
+                <a:spcPts val="0"/>
+              </a:spcAft>
+              <a:buNone/>
+            </a:pPr>
+            <a:r>
+              <a:t/>
+            </a:r>
+            <a:endParaRPr b="0" i="0" sz="1800" u="none" cap="none" strike="noStrike">
+              <a:solidFill>
+                <a:schemeClr val="dk1"/>
+              </a:solidFill>
+              <a:latin typeface="Calibri"/>
+              <a:ea typeface="Calibri"/>
+              <a:cs typeface="Calibri"/>
+              <a:sym typeface="Calibri"/>
+            </a:endParaRPr>
+          </a:p>
+        </p:txBody>
+      </p:sp>
+    </p:spTree>
+  </p:cSld>
+  <p:clrMapOvr>
+    <a:masterClrMapping/>
+  </p:clrMapOvr>
+</p:sld>
+</file>
+
+<file path=ppt/slides/slide5.xml><?xml version="1.0" encoding="utf-8"?>
+<p:sld xmlns:a="http://schemas.openxmlformats.org/drawingml/2006/main" xmlns:r="http://schemas.openxmlformats.org/officeDocument/2006/relationships" xmlns:mc="http://schemas.openxmlformats.org/markup-compatibility/2006" xmlns:mv="urn:schemas-microsoft-com:mac:vml" xmlns:p="http://schemas.openxmlformats.org/presentationml/2006/main" xmlns:c="http://schemas.openxmlformats.org/drawingml/2006/chart" xmlns:dgm="http://schemas.openxmlformats.org/drawingml/2006/diagram" xmlns:o="urn:schemas-microsoft-com:office:office" xmlns:v="urn:schemas-microsoft-com:vml" xmlns:pvml="urn:schemas-microsoft-com:office:powerpoint" xmlns:com="http://schemas.openxmlformats.org/drawingml/2006/compatibility" xmlns:p14="http://schemas.microsoft.com/office/powerpoint/2010/main" xmlns:p15="http://schemas.microsoft.com/office/powerpoint/2012/main" xmlns:ahyp="http://schemas.microsoft.com/office/drawing/2018/hyperlinkcolor">
+  <p:cSld>
+    <p:bg>
+      <p:bgPr>
+        <a:solidFill>
+          <a:srgbClr val="FFFFFF"/>
+        </a:solidFill>
+      </p:bgPr>
+    </p:bg>
+    <p:spTree>
+      <p:nvGrpSpPr>
+        <p:cNvPr id="130" name="Shape 130"/>
+        <p:cNvGrpSpPr/>
+        <p:nvPr/>
+      </p:nvGrpSpPr>
+      <p:grpSpPr>
+        <a:xfrm>
+          <a:off x="0" y="0"/>
+          <a:ext cx="0" cy="0"/>
+          <a:chOff x="0" y="0"/>
+          <a:chExt cx="0" cy="0"/>
+        </a:xfrm>
+      </p:grpSpPr>
+      <p:pic>
+        <p:nvPicPr>
+          <p:cNvPr descr="image.png" id="131" name="Google Shape;131;p17"/>
+          <p:cNvPicPr preferRelativeResize="0"/>
+          <p:nvPr/>
+        </p:nvPicPr>
+        <p:blipFill rotWithShape="1">
+          <a:blip r:embed="rId3">
+            <a:alphaModFix/>
+          </a:blip>
+          <a:srcRect b="0" l="0" r="0" t="0"/>
+          <a:stretch/>
+        </p:blipFill>
+        <p:spPr>
+          <a:xfrm>
+            <a:off x="0" y="0"/>
+            <a:ext cx="12192000" cy="6858000"/>
+          </a:xfrm>
+          <a:prstGeom prst="rect">
+            <a:avLst/>
+          </a:prstGeom>
+          <a:noFill/>
+          <a:ln>
+            <a:noFill/>
+          </a:ln>
+        </p:spPr>
+      </p:pic>
+      <p:pic>
+        <p:nvPicPr>
+          <p:cNvPr descr="image.png" id="132" name="Google Shape;132;p17"/>
+          <p:cNvPicPr preferRelativeResize="0"/>
+          <p:nvPr/>
+        </p:nvPicPr>
+        <p:blipFill rotWithShape="1">
+          <a:blip r:embed="rId4">
+            <a:alphaModFix/>
+          </a:blip>
+          <a:srcRect b="0" l="0" r="0" t="0"/>
+          <a:stretch/>
+        </p:blipFill>
+        <p:spPr>
+          <a:xfrm>
+            <a:off x="571500" y="2124075"/>
+            <a:ext cx="5238750" cy="2714625"/>
+          </a:xfrm>
+          <a:prstGeom prst="rect">
+            <a:avLst/>
+          </a:prstGeom>
+          <a:noFill/>
+          <a:ln>
+            <a:noFill/>
+          </a:ln>
+        </p:spPr>
+      </p:pic>
+      <p:pic>
+        <p:nvPicPr>
+          <p:cNvPr descr="image.png" id="133" name="Google Shape;133;p17"/>
+          <p:cNvPicPr preferRelativeResize="0"/>
+          <p:nvPr/>
+        </p:nvPicPr>
+        <p:blipFill rotWithShape="1">
+          <a:blip r:embed="rId5">
+            <a:alphaModFix/>
+          </a:blip>
+          <a:srcRect b="0" l="0" r="0" t="0"/>
+          <a:stretch/>
+        </p:blipFill>
+        <p:spPr>
+          <a:xfrm>
+            <a:off x="6381750" y="2124075"/>
+            <a:ext cx="5238750" cy="2714625"/>
+          </a:xfrm>
+          <a:prstGeom prst="rect">
+            <a:avLst/>
+          </a:prstGeom>
+          <a:noFill/>
+          <a:ln>
+            <a:noFill/>
+          </a:ln>
+        </p:spPr>
+      </p:pic>
+      <p:sp>
+        <p:nvSpPr>
+          <p:cNvPr id="134" name="Google Shape;134;p17"/>
+          <p:cNvSpPr txBox="1"/>
+          <p:nvPr/>
+        </p:nvSpPr>
+        <p:spPr>
+          <a:xfrm>
+            <a:off x="571500" y="5124450"/>
+            <a:ext cx="11049000" cy="304800"/>
+          </a:xfrm>
+          <a:prstGeom prst="rect">
+            <a:avLst/>
+          </a:prstGeom>
+          <a:noFill/>
+          <a:ln>
+            <a:noFill/>
+          </a:ln>
+        </p:spPr>
+        <p:txBody>
+          <a:bodyPr anchorCtr="0" anchor="t" bIns="0" lIns="0" spcFirstLastPara="1" rIns="0" wrap="square" tIns="0">
+            <a:spAutoFit/>
+          </a:bodyPr>
+          <a:lstStyle/>
+          <a:p>
+            <a:pPr indent="0" lvl="0" marL="0" marR="0" rtl="0" algn="ctr">
+              <a:lnSpc>
+                <a:spcPct val="160000"/>
+              </a:lnSpc>
+              <a:spcBef>
+                <a:spcPts val="0"/>
+              </a:spcBef>
+              <a:spcAft>
+                <a:spcPts val="0"/>
+              </a:spcAft>
+              <a:buNone/>
+            </a:pPr>
+            <a:r>
+              <a:rPr b="1" i="0" lang="en-US" sz="1500" u="none" cap="none" strike="noStrike">
+                <a:solidFill>
+                  <a:srgbClr val="0D9488"/>
+                </a:solidFill>
+                <a:latin typeface="Lato"/>
+                <a:ea typeface="Lato"/>
+                <a:cs typeface="Lato"/>
+                <a:sym typeface="Lato"/>
+              </a:rPr>
+              <a:t>A junção das duas pilhas simula perfeitamente uma fita bidirecional infinita.</a:t>
+            </a:r>
+            <a:endParaRPr/>
+          </a:p>
+        </p:txBody>
+      </p:sp>
+      <p:sp>
+        <p:nvSpPr>
+          <p:cNvPr id="135" name="Google Shape;135;p17"/>
+          <p:cNvSpPr txBox="1"/>
+          <p:nvPr/>
+        </p:nvSpPr>
+        <p:spPr>
+          <a:xfrm>
+            <a:off x="750570" y="3152775"/>
+            <a:ext cx="4880610" cy="400050"/>
+          </a:xfrm>
+          <a:prstGeom prst="rect">
+            <a:avLst/>
+          </a:prstGeom>
+          <a:noFill/>
+          <a:ln>
+            <a:noFill/>
+          </a:ln>
+        </p:spPr>
+        <p:txBody>
+          <a:bodyPr anchorCtr="0" anchor="t" bIns="0" lIns="0" spcFirstLastPara="1" rIns="0" wrap="square" tIns="0">
+            <a:spAutoFit/>
+          </a:bodyPr>
+          <a:lstStyle/>
+          <a:p>
+            <a:pPr indent="0" lvl="0" marL="0" marR="0" rtl="0" algn="ctr">
+              <a:spcBef>
+                <a:spcPts val="0"/>
+              </a:spcBef>
+              <a:spcAft>
+                <a:spcPts val="0"/>
+              </a:spcAft>
+              <a:buNone/>
+            </a:pPr>
+            <a:r>
+              <a:rPr b="1" i="0" lang="en-US" sz="2100" u="none" cap="none" strike="noStrike">
+                <a:solidFill>
+                  <a:srgbClr val="1E293B"/>
+                </a:solidFill>
+                <a:latin typeface="Poppins"/>
+                <a:ea typeface="Poppins"/>
+                <a:cs typeface="Poppins"/>
+                <a:sym typeface="Poppins"/>
+              </a:rPr>
+              <a:t>Pilha da Esquerda</a:t>
+            </a:r>
+            <a:endParaRPr/>
+          </a:p>
+        </p:txBody>
+      </p:sp>
+      <p:sp>
+        <p:nvSpPr>
+          <p:cNvPr id="136" name="Google Shape;136;p17"/>
+          <p:cNvSpPr txBox="1"/>
+          <p:nvPr/>
+        </p:nvSpPr>
+        <p:spPr>
+          <a:xfrm>
+            <a:off x="866775" y="3743325"/>
+            <a:ext cx="4648200" cy="609600"/>
+          </a:xfrm>
+          <a:prstGeom prst="rect">
+            <a:avLst/>
+          </a:prstGeom>
+          <a:noFill/>
+          <a:ln>
+            <a:noFill/>
+          </a:ln>
+        </p:spPr>
+        <p:txBody>
+          <a:bodyPr anchorCtr="0" anchor="t" bIns="0" lIns="0" spcFirstLastPara="1" rIns="0" wrap="square" tIns="0">
+            <a:spAutoFit/>
+          </a:bodyPr>
+          <a:lstStyle/>
+          <a:p>
+            <a:pPr indent="0" lvl="0" marL="0" marR="0" rtl="0" algn="ctr">
+              <a:lnSpc>
+                <a:spcPct val="160000"/>
+              </a:lnSpc>
+              <a:spcBef>
+                <a:spcPts val="0"/>
+              </a:spcBef>
+              <a:spcAft>
+                <a:spcPts val="0"/>
+              </a:spcAft>
+              <a:buNone/>
+            </a:pPr>
+            <a:r>
+              <a:rPr b="0" i="0" lang="en-US" sz="1500" u="none" cap="none" strike="noStrike">
+                <a:solidFill>
+                  <a:srgbClr val="475569"/>
+                </a:solidFill>
+                <a:latin typeface="Lato"/>
+                <a:ea typeface="Lato"/>
+                <a:cs typeface="Lato"/>
+                <a:sym typeface="Lato"/>
+              </a:rPr>
+              <a:t>Armazena todos os símbolos à esquerda da cabeça de leitura, com o símbolo mais próximo no topo.</a:t>
+            </a:r>
+            <a:endParaRPr/>
+          </a:p>
+        </p:txBody>
+      </p:sp>
+      <p:sp>
+        <p:nvSpPr>
+          <p:cNvPr id="137" name="Google Shape;137;p17"/>
+          <p:cNvSpPr txBox="1"/>
+          <p:nvPr/>
+        </p:nvSpPr>
+        <p:spPr>
+          <a:xfrm>
+            <a:off x="6560820" y="3152775"/>
+            <a:ext cx="4880610" cy="400050"/>
+          </a:xfrm>
+          <a:prstGeom prst="rect">
+            <a:avLst/>
+          </a:prstGeom>
+          <a:noFill/>
+          <a:ln>
+            <a:noFill/>
+          </a:ln>
+        </p:spPr>
+        <p:txBody>
+          <a:bodyPr anchorCtr="0" anchor="t" bIns="0" lIns="0" spcFirstLastPara="1" rIns="0" wrap="square" tIns="0">
+            <a:spAutoFit/>
+          </a:bodyPr>
+          <a:lstStyle/>
+          <a:p>
+            <a:pPr indent="0" lvl="0" marL="0" marR="0" rtl="0" algn="ctr">
+              <a:spcBef>
+                <a:spcPts val="0"/>
+              </a:spcBef>
+              <a:spcAft>
+                <a:spcPts val="0"/>
+              </a:spcAft>
+              <a:buNone/>
+            </a:pPr>
+            <a:r>
+              <a:rPr b="1" i="0" lang="en-US" sz="2100" u="none" cap="none" strike="noStrike">
+                <a:solidFill>
+                  <a:srgbClr val="1E293B"/>
+                </a:solidFill>
+                <a:latin typeface="Poppins"/>
+                <a:ea typeface="Poppins"/>
+                <a:cs typeface="Poppins"/>
+                <a:sym typeface="Poppins"/>
+              </a:rPr>
+              <a:t>Pilha da Direita</a:t>
+            </a:r>
+            <a:endParaRPr/>
+          </a:p>
+        </p:txBody>
+      </p:sp>
+      <p:sp>
+        <p:nvSpPr>
+          <p:cNvPr id="138" name="Google Shape;138;p17"/>
+          <p:cNvSpPr txBox="1"/>
+          <p:nvPr/>
+        </p:nvSpPr>
+        <p:spPr>
+          <a:xfrm>
+            <a:off x="6677025" y="3743325"/>
+            <a:ext cx="4648200" cy="609600"/>
+          </a:xfrm>
+          <a:prstGeom prst="rect">
+            <a:avLst/>
+          </a:prstGeom>
+          <a:noFill/>
+          <a:ln>
+            <a:noFill/>
+          </a:ln>
+        </p:spPr>
+        <p:txBody>
+          <a:bodyPr anchorCtr="0" anchor="t" bIns="0" lIns="0" spcFirstLastPara="1" rIns="0" wrap="square" tIns="0">
+            <a:spAutoFit/>
+          </a:bodyPr>
+          <a:lstStyle/>
+          <a:p>
+            <a:pPr indent="0" lvl="0" marL="0" marR="0" rtl="0" algn="ctr">
+              <a:lnSpc>
+                <a:spcPct val="160000"/>
+              </a:lnSpc>
+              <a:spcBef>
+                <a:spcPts val="0"/>
+              </a:spcBef>
+              <a:spcAft>
+                <a:spcPts val="0"/>
+              </a:spcAft>
+              <a:buNone/>
+            </a:pPr>
+            <a:r>
+              <a:rPr b="0" i="0" lang="en-US" sz="1500" u="none" cap="none" strike="noStrike">
+                <a:solidFill>
+                  <a:srgbClr val="475569"/>
+                </a:solidFill>
+                <a:latin typeface="Lato"/>
+                <a:ea typeface="Lato"/>
+                <a:cs typeface="Lato"/>
+                <a:sym typeface="Lato"/>
+              </a:rPr>
+              <a:t>Armazena o símbolo sob a cabeça de leitura e todos os símbolos à sua direita na fita.</a:t>
+            </a:r>
+            <a:endParaRPr/>
+          </a:p>
+        </p:txBody>
+      </p:sp>
+      <p:pic>
+        <p:nvPicPr>
+          <p:cNvPr descr="image.png" id="139" name="Google Shape;139;p17"/>
+          <p:cNvPicPr preferRelativeResize="0"/>
+          <p:nvPr/>
+        </p:nvPicPr>
+        <p:blipFill rotWithShape="1">
+          <a:blip r:embed="rId6">
+            <a:alphaModFix/>
+          </a:blip>
+          <a:srcRect b="0" l="0" r="0" t="0"/>
+          <a:stretch/>
+        </p:blipFill>
+        <p:spPr>
+          <a:xfrm>
+            <a:off x="2933700" y="2466975"/>
+            <a:ext cx="514350" cy="457200"/>
+          </a:xfrm>
+          <a:prstGeom prst="rect">
+            <a:avLst/>
+          </a:prstGeom>
+          <a:noFill/>
+          <a:ln>
+            <a:noFill/>
+          </a:ln>
+        </p:spPr>
+      </p:pic>
+      <p:pic>
+        <p:nvPicPr>
+          <p:cNvPr descr="image.png" id="140" name="Google Shape;140;p17"/>
+          <p:cNvPicPr preferRelativeResize="0"/>
+          <p:nvPr/>
+        </p:nvPicPr>
+        <p:blipFill rotWithShape="1">
+          <a:blip r:embed="rId7">
+            <a:alphaModFix/>
+          </a:blip>
+          <a:srcRect b="0" l="0" r="0" t="0"/>
+          <a:stretch/>
+        </p:blipFill>
+        <p:spPr>
+          <a:xfrm>
+            <a:off x="8801100" y="2466975"/>
+            <a:ext cx="400050" cy="457200"/>
+          </a:xfrm>
+          <a:prstGeom prst="rect">
+            <a:avLst/>
+          </a:prstGeom>
+          <a:noFill/>
+          <a:ln>
+            <a:noFill/>
+          </a:ln>
+        </p:spPr>
+      </p:pic>
+      <p:sp>
+        <p:nvSpPr>
+          <p:cNvPr id="141" name="Google Shape;141;p17"/>
           <p:cNvSpPr txBox="1"/>
           <p:nvPr/>
         </p:nvSpPr>
@@ -13433,7 +15000,7 @@
 </p:sld>
 </file>
 
-<file path=ppt/slides/slide5.xml><?xml version="1.0" encoding="utf-8"?>
+<file path=ppt/slides/slide6.xml><?xml version="1.0" encoding="utf-8"?>
 <p:sld xmlns:a="http://schemas.openxmlformats.org/drawingml/2006/main" xmlns:r="http://schemas.openxmlformats.org/officeDocument/2006/relationships" xmlns:mc="http://schemas.openxmlformats.org/markup-compatibility/2006" xmlns:mv="urn:schemas-microsoft-com:mac:vml" xmlns:p="http://schemas.openxmlformats.org/presentationml/2006/main" xmlns:c="http://schemas.openxmlformats.org/drawingml/2006/chart" xmlns:dgm="http://schemas.openxmlformats.org/drawingml/2006/diagram" xmlns:o="urn:schemas-microsoft-com:office:office" xmlns:v="urn:schemas-microsoft-com:vml" xmlns:pvml="urn:schemas-microsoft-com:office:powerpoint" xmlns:com="http://schemas.openxmlformats.org/drawingml/2006/compatibility" xmlns:p14="http://schemas.microsoft.com/office/powerpoint/2010/main" xmlns:p15="http://schemas.microsoft.com/office/powerpoint/2012/main" xmlns:ahyp="http://schemas.microsoft.com/office/drawing/2018/hyperlinkcolor">
   <p:cSld>
     <p:bg>
@@ -13445,7 +15012,7 @@
     </p:bg>
     <p:spTree>
       <p:nvGrpSpPr>
-        <p:cNvPr id="126" name="Shape 126"/>
+        <p:cNvPr id="145" name="Shape 145"/>
         <p:cNvGrpSpPr/>
         <p:nvPr/>
       </p:nvGrpSpPr>
@@ -13459,7 +15026,7 @@
       </p:grpSpPr>
       <p:pic>
         <p:nvPicPr>
-          <p:cNvPr descr="image.png" id="127" name="Google Shape;127;p17"/>
+          <p:cNvPr descr="image.png" id="146" name="Google Shape;146;p18"/>
           <p:cNvPicPr preferRelativeResize="0"/>
           <p:nvPr/>
         </p:nvPicPr>
@@ -13486,7 +15053,7 @@
       </p:pic>
       <p:grpSp>
         <p:nvGrpSpPr>
-          <p:cNvPr id="128" name="Google Shape;128;p17"/>
+          <p:cNvPr id="147" name="Google Shape;147;p18"/>
           <p:cNvGrpSpPr/>
           <p:nvPr/>
         </p:nvGrpSpPr>
@@ -13500,7 +15067,7 @@
         </p:grpSpPr>
         <p:sp>
           <p:nvSpPr>
-            <p:cNvPr id="129" name="Google Shape;129;p17"/>
+            <p:cNvPr id="148" name="Google Shape;148;p18"/>
             <p:cNvSpPr/>
             <p:nvPr/>
           </p:nvSpPr>
@@ -13551,7 +15118,7 @@
         </p:sp>
         <p:sp>
           <p:nvSpPr>
-            <p:cNvPr id="130" name="Google Shape;130;p17"/>
+            <p:cNvPr id="149" name="Google Shape;149;p18"/>
             <p:cNvSpPr txBox="1"/>
             <p:nvPr/>
           </p:nvSpPr>
@@ -13641,7 +15208,7 @@
         </p:sp>
         <p:sp>
           <p:nvSpPr>
-            <p:cNvPr id="131" name="Google Shape;131;p17"/>
+            <p:cNvPr id="150" name="Google Shape;150;p18"/>
             <p:cNvSpPr txBox="1"/>
             <p:nvPr/>
           </p:nvSpPr>
@@ -13699,7 +15266,7 @@
         </p:sp>
         <p:sp>
           <p:nvSpPr>
-            <p:cNvPr id="132" name="Google Shape;132;p17"/>
+            <p:cNvPr id="151" name="Google Shape;151;p18"/>
             <p:cNvSpPr txBox="1"/>
             <p:nvPr/>
           </p:nvSpPr>
@@ -13790,7 +15357,7 @@
       </p:grpSp>
       <p:grpSp>
         <p:nvGrpSpPr>
-          <p:cNvPr id="133" name="Google Shape;133;p17"/>
+          <p:cNvPr id="152" name="Google Shape;152;p18"/>
           <p:cNvGrpSpPr/>
           <p:nvPr/>
         </p:nvGrpSpPr>
@@ -13804,7 +15371,7 @@
         </p:grpSpPr>
         <p:sp>
           <p:nvSpPr>
-            <p:cNvPr id="134" name="Google Shape;134;p17"/>
+            <p:cNvPr id="153" name="Google Shape;153;p18"/>
             <p:cNvSpPr/>
             <p:nvPr/>
           </p:nvSpPr>
@@ -13855,7 +15422,7 @@
         </p:sp>
         <p:sp>
           <p:nvSpPr>
-            <p:cNvPr id="135" name="Google Shape;135;p17"/>
+            <p:cNvPr id="154" name="Google Shape;154;p18"/>
             <p:cNvSpPr txBox="1"/>
             <p:nvPr/>
           </p:nvSpPr>
@@ -14026,7 +15593,7 @@
       </p:grpSp>
       <p:sp>
         <p:nvSpPr>
-          <p:cNvPr id="136" name="Google Shape;136;p17"/>
+          <p:cNvPr id="155" name="Google Shape;155;p18"/>
           <p:cNvSpPr txBox="1"/>
           <p:nvPr/>
         </p:nvSpPr>
@@ -14082,7 +15649,7 @@
 </p:sld>
 </file>
 
-<file path=ppt/slides/slide6.xml><?xml version="1.0" encoding="utf-8"?>
+<file path=ppt/slides/slide7.xml><?xml version="1.0" encoding="utf-8"?>
 <p:sld xmlns:a="http://schemas.openxmlformats.org/drawingml/2006/main" xmlns:r="http://schemas.openxmlformats.org/officeDocument/2006/relationships" xmlns:mc="http://schemas.openxmlformats.org/markup-compatibility/2006" xmlns:mv="urn:schemas-microsoft-com:mac:vml" xmlns:p="http://schemas.openxmlformats.org/presentationml/2006/main" xmlns:c="http://schemas.openxmlformats.org/drawingml/2006/chart" xmlns:dgm="http://schemas.openxmlformats.org/drawingml/2006/diagram" xmlns:o="urn:schemas-microsoft-com:office:office" xmlns:v="urn:schemas-microsoft-com:vml" xmlns:pvml="urn:schemas-microsoft-com:office:powerpoint" xmlns:com="http://schemas.openxmlformats.org/drawingml/2006/compatibility" xmlns:p14="http://schemas.microsoft.com/office/powerpoint/2010/main" xmlns:p15="http://schemas.microsoft.com/office/powerpoint/2012/main" xmlns:ahyp="http://schemas.microsoft.com/office/drawing/2018/hyperlinkcolor">
   <p:cSld>
     <p:bg>
@@ -14094,7 +15661,7 @@
     </p:bg>
     <p:spTree>
       <p:nvGrpSpPr>
-        <p:cNvPr id="140" name="Shape 140"/>
+        <p:cNvPr id="159" name="Shape 159"/>
         <p:cNvGrpSpPr/>
         <p:nvPr/>
       </p:nvGrpSpPr>
@@ -14108,7 +15675,7 @@
       </p:grpSpPr>
       <p:pic>
         <p:nvPicPr>
-          <p:cNvPr descr="image.png" id="141" name="Google Shape;141;p18"/>
+          <p:cNvPr descr="image.png" id="160" name="Google Shape;160;p19"/>
           <p:cNvPicPr preferRelativeResize="0"/>
           <p:nvPr/>
         </p:nvPicPr>
@@ -14135,7 +15702,7 @@
       </p:pic>
       <p:sp>
         <p:nvSpPr>
-          <p:cNvPr id="142" name="Google Shape;142;p18"/>
+          <p:cNvPr id="161" name="Google Shape;161;p19"/>
           <p:cNvSpPr txBox="1"/>
           <p:nvPr/>
         </p:nvSpPr>
@@ -14185,7 +15752,7 @@
       </p:sp>
       <p:sp>
         <p:nvSpPr>
-          <p:cNvPr id="143" name="Google Shape;143;p18"/>
+          <p:cNvPr id="162" name="Google Shape;162;p19"/>
           <p:cNvSpPr txBox="1"/>
           <p:nvPr/>
         </p:nvSpPr>
@@ -14262,7 +15829,7 @@
       </p:sp>
       <p:sp>
         <p:nvSpPr>
-          <p:cNvPr id="144" name="Google Shape;144;p18"/>
+          <p:cNvPr id="163" name="Google Shape;163;p19"/>
           <p:cNvSpPr txBox="1"/>
           <p:nvPr/>
         </p:nvSpPr>
@@ -14339,7 +15906,7 @@
       </p:sp>
       <p:sp>
         <p:nvSpPr>
-          <p:cNvPr id="145" name="Google Shape;145;p18"/>
+          <p:cNvPr id="164" name="Google Shape;164;p19"/>
           <p:cNvSpPr txBox="1"/>
           <p:nvPr/>
         </p:nvSpPr>
@@ -14392,7 +15959,7 @@
       </p:sp>
       <p:sp>
         <p:nvSpPr>
-          <p:cNvPr id="146" name="Google Shape;146;p18"/>
+          <p:cNvPr id="165" name="Google Shape;165;p19"/>
           <p:cNvSpPr txBox="1"/>
           <p:nvPr/>
         </p:nvSpPr>
@@ -14445,7 +16012,7 @@
       </p:sp>
       <p:sp>
         <p:nvSpPr>
-          <p:cNvPr id="147" name="Google Shape;147;p18"/>
+          <p:cNvPr id="166" name="Google Shape;166;p19"/>
           <p:cNvSpPr txBox="1"/>
           <p:nvPr/>
         </p:nvSpPr>
@@ -14498,7 +16065,7 @@
       </p:sp>
       <p:sp>
         <p:nvSpPr>
-          <p:cNvPr id="148" name="Google Shape;148;p18"/>
+          <p:cNvPr id="167" name="Google Shape;167;p19"/>
           <p:cNvSpPr txBox="1"/>
           <p:nvPr/>
         </p:nvSpPr>
@@ -14551,7 +16118,7 @@
       </p:sp>
       <p:pic>
         <p:nvPicPr>
-          <p:cNvPr descr="image.png" id="149" name="Google Shape;149;p18"/>
+          <p:cNvPr descr="image.png" id="168" name="Google Shape;168;p19"/>
           <p:cNvPicPr preferRelativeResize="0"/>
           <p:nvPr/>
         </p:nvPicPr>
@@ -14578,7 +16145,7 @@
       </p:pic>
       <p:pic>
         <p:nvPicPr>
-          <p:cNvPr descr="image.png" id="150" name="Google Shape;150;p18"/>
+          <p:cNvPr descr="image.png" id="169" name="Google Shape;169;p19"/>
           <p:cNvPicPr preferRelativeResize="0"/>
           <p:nvPr/>
         </p:nvPicPr>
@@ -14605,7 +16172,7 @@
       </p:pic>
       <p:pic>
         <p:nvPicPr>
-          <p:cNvPr descr="image.png" id="151" name="Google Shape;151;p18"/>
+          <p:cNvPr descr="image.png" id="170" name="Google Shape;170;p19"/>
           <p:cNvPicPr preferRelativeResize="0"/>
           <p:nvPr/>
         </p:nvPicPr>
@@ -14632,7 +16199,7 @@
       </p:pic>
       <p:pic>
         <p:nvPicPr>
-          <p:cNvPr descr="image.png" id="152" name="Google Shape;152;p18"/>
+          <p:cNvPr descr="image.png" id="171" name="Google Shape;171;p19"/>
           <p:cNvPicPr preferRelativeResize="0"/>
           <p:nvPr/>
         </p:nvPicPr>
@@ -14659,7 +16226,7 @@
       </p:pic>
       <p:pic>
         <p:nvPicPr>
-          <p:cNvPr descr="image.png" id="153" name="Google Shape;153;p18"/>
+          <p:cNvPr descr="image.png" id="172" name="Google Shape;172;p19"/>
           <p:cNvPicPr preferRelativeResize="0"/>
           <p:nvPr/>
         </p:nvPicPr>
@@ -14692,7 +16259,7 @@
 </p:sld>
 </file>
 
-<file path=ppt/slides/slide7.xml><?xml version="1.0" encoding="utf-8"?>
+<file path=ppt/slides/slide8.xml><?xml version="1.0" encoding="utf-8"?>
 <p:sld xmlns:a="http://schemas.openxmlformats.org/drawingml/2006/main" xmlns:r="http://schemas.openxmlformats.org/officeDocument/2006/relationships" xmlns:mc="http://schemas.openxmlformats.org/markup-compatibility/2006" xmlns:mv="urn:schemas-microsoft-com:mac:vml" xmlns:p="http://schemas.openxmlformats.org/presentationml/2006/main" xmlns:c="http://schemas.openxmlformats.org/drawingml/2006/chart" xmlns:dgm="http://schemas.openxmlformats.org/drawingml/2006/diagram" xmlns:o="urn:schemas-microsoft-com:office:office" xmlns:v="urn:schemas-microsoft-com:vml" xmlns:pvml="urn:schemas-microsoft-com:office:powerpoint" xmlns:com="http://schemas.openxmlformats.org/drawingml/2006/compatibility" xmlns:p14="http://schemas.microsoft.com/office/powerpoint/2010/main" xmlns:p15="http://schemas.microsoft.com/office/powerpoint/2012/main" xmlns:ahyp="http://schemas.microsoft.com/office/drawing/2018/hyperlinkcolor">
   <p:cSld>
     <p:bg>
@@ -14704,7 +16271,7 @@
     </p:bg>
     <p:spTree>
       <p:nvGrpSpPr>
-        <p:cNvPr id="157" name="Shape 157"/>
+        <p:cNvPr id="176" name="Shape 176"/>
         <p:cNvGrpSpPr/>
         <p:nvPr/>
       </p:nvGrpSpPr>
@@ -14718,7 +16285,7 @@
       </p:grpSpPr>
       <p:pic>
         <p:nvPicPr>
-          <p:cNvPr descr="image.png" id="158" name="Google Shape;158;p19"/>
+          <p:cNvPr descr="image.png" id="177" name="Google Shape;177;p20"/>
           <p:cNvPicPr preferRelativeResize="0"/>
           <p:nvPr/>
         </p:nvPicPr>
@@ -14745,7 +16312,7 @@
       </p:pic>
       <p:pic>
         <p:nvPicPr>
-          <p:cNvPr descr="image.png" id="159" name="Google Shape;159;p19"/>
+          <p:cNvPr descr="image.png" id="178" name="Google Shape;178;p20"/>
           <p:cNvPicPr preferRelativeResize="0"/>
           <p:nvPr/>
         </p:nvPicPr>
@@ -14772,7 +16339,7 @@
       </p:pic>
       <p:pic>
         <p:nvPicPr>
-          <p:cNvPr descr="image.png" id="160" name="Google Shape;160;p19"/>
+          <p:cNvPr descr="image.png" id="179" name="Google Shape;179;p20"/>
           <p:cNvPicPr preferRelativeResize="0"/>
           <p:nvPr/>
         </p:nvPicPr>
@@ -14799,7 +16366,7 @@
       </p:pic>
       <p:pic>
         <p:nvPicPr>
-          <p:cNvPr descr="image.png" id="161" name="Google Shape;161;p19"/>
+          <p:cNvPr descr="image.png" id="180" name="Google Shape;180;p20"/>
           <p:cNvPicPr preferRelativeResize="0"/>
           <p:nvPr/>
         </p:nvPicPr>
@@ -14826,7 +16393,7 @@
       </p:pic>
       <p:sp>
         <p:nvSpPr>
-          <p:cNvPr id="162" name="Google Shape;162;p19"/>
+          <p:cNvPr id="181" name="Google Shape;181;p20"/>
           <p:cNvSpPr txBox="1"/>
           <p:nvPr/>
         </p:nvSpPr>
@@ -14876,7 +16443,7 @@
       </p:sp>
       <p:sp>
         <p:nvSpPr>
-          <p:cNvPr id="163" name="Google Shape;163;p19"/>
+          <p:cNvPr id="182" name="Google Shape;182;p20"/>
           <p:cNvSpPr txBox="1"/>
           <p:nvPr/>
         </p:nvSpPr>
@@ -14929,7 +16496,7 @@
       </p:sp>
       <p:sp>
         <p:nvSpPr>
-          <p:cNvPr id="164" name="Google Shape;164;p19"/>
+          <p:cNvPr id="183" name="Google Shape;183;p20"/>
           <p:cNvSpPr txBox="1"/>
           <p:nvPr/>
         </p:nvSpPr>
@@ -14979,7 +16546,7 @@
       </p:sp>
       <p:sp>
         <p:nvSpPr>
-          <p:cNvPr id="165" name="Google Shape;165;p19"/>
+          <p:cNvPr id="184" name="Google Shape;184;p20"/>
           <p:cNvSpPr txBox="1"/>
           <p:nvPr/>
         </p:nvSpPr>
@@ -15032,7 +16599,7 @@
       </p:sp>
       <p:sp>
         <p:nvSpPr>
-          <p:cNvPr id="166" name="Google Shape;166;p19"/>
+          <p:cNvPr id="185" name="Google Shape;185;p20"/>
           <p:cNvSpPr txBox="1"/>
           <p:nvPr/>
         </p:nvSpPr>
@@ -15082,7 +16649,7 @@
       </p:sp>
       <p:sp>
         <p:nvSpPr>
-          <p:cNvPr id="167" name="Google Shape;167;p19"/>
+          <p:cNvPr id="186" name="Google Shape;186;p20"/>
           <p:cNvSpPr txBox="1"/>
           <p:nvPr/>
         </p:nvSpPr>
@@ -15135,7 +16702,7 @@
       </p:sp>
       <p:pic>
         <p:nvPicPr>
-          <p:cNvPr descr="image.png" id="168" name="Google Shape;168;p19"/>
+          <p:cNvPr descr="image.png" id="187" name="Google Shape;187;p20"/>
           <p:cNvPicPr preferRelativeResize="0"/>
           <p:nvPr/>
         </p:nvPicPr>
@@ -15162,7 +16729,7 @@
       </p:pic>
       <p:pic>
         <p:nvPicPr>
-          <p:cNvPr descr="image.png" id="169" name="Google Shape;169;p19"/>
+          <p:cNvPr descr="image.png" id="188" name="Google Shape;188;p20"/>
           <p:cNvPicPr preferRelativeResize="0"/>
           <p:nvPr/>
         </p:nvPicPr>
@@ -15189,7 +16756,7 @@
       </p:pic>
       <p:pic>
         <p:nvPicPr>
-          <p:cNvPr descr="image.png" id="170" name="Google Shape;170;p19"/>
+          <p:cNvPr descr="image.png" id="189" name="Google Shape;189;p20"/>
           <p:cNvPicPr preferRelativeResize="0"/>
           <p:nvPr/>
         </p:nvPicPr>
@@ -15216,7 +16783,7 @@
       </p:pic>
       <p:sp>
         <p:nvSpPr>
-          <p:cNvPr id="171" name="Google Shape;171;p19"/>
+          <p:cNvPr id="190" name="Google Shape;190;p20"/>
           <p:cNvSpPr txBox="1"/>
           <p:nvPr/>
         </p:nvSpPr>
@@ -15272,7 +16839,7 @@
 </p:sld>
 </file>
 
-<file path=ppt/slides/slide8.xml><?xml version="1.0" encoding="utf-8"?>
+<file path=ppt/slides/slide9.xml><?xml version="1.0" encoding="utf-8"?>
 <p:sld xmlns:a="http://schemas.openxmlformats.org/drawingml/2006/main" xmlns:r="http://schemas.openxmlformats.org/officeDocument/2006/relationships" xmlns:mc="http://schemas.openxmlformats.org/markup-compatibility/2006" xmlns:mv="urn:schemas-microsoft-com:mac:vml" xmlns:p="http://schemas.openxmlformats.org/presentationml/2006/main" xmlns:c="http://schemas.openxmlformats.org/drawingml/2006/chart" xmlns:dgm="http://schemas.openxmlformats.org/drawingml/2006/diagram" xmlns:o="urn:schemas-microsoft-com:office:office" xmlns:v="urn:schemas-microsoft-com:vml" xmlns:pvml="urn:schemas-microsoft-com:office:powerpoint" xmlns:com="http://schemas.openxmlformats.org/drawingml/2006/compatibility" xmlns:p14="http://schemas.microsoft.com/office/powerpoint/2010/main" xmlns:p15="http://schemas.microsoft.com/office/powerpoint/2012/main" xmlns:ahyp="http://schemas.microsoft.com/office/drawing/2018/hyperlinkcolor">
   <p:cSld>
     <p:bg>
@@ -15284,7 +16851,7 @@
     </p:bg>
     <p:spTree>
       <p:nvGrpSpPr>
-        <p:cNvPr id="175" name="Shape 175"/>
+        <p:cNvPr id="194" name="Shape 194"/>
         <p:cNvGrpSpPr/>
         <p:nvPr/>
       </p:nvGrpSpPr>
@@ -15298,7 +16865,7 @@
       </p:grpSpPr>
       <p:pic>
         <p:nvPicPr>
-          <p:cNvPr descr="image.png" id="176" name="Google Shape;176;p20"/>
+          <p:cNvPr descr="image.png" id="195" name="Google Shape;195;p21"/>
           <p:cNvPicPr preferRelativeResize="0"/>
           <p:nvPr/>
         </p:nvPicPr>
@@ -15325,7 +16892,7 @@
       </p:pic>
       <p:sp>
         <p:nvSpPr>
-          <p:cNvPr id="177" name="Google Shape;177;p20"/>
+          <p:cNvPr id="196" name="Google Shape;196;p21"/>
           <p:cNvSpPr/>
           <p:nvPr/>
         </p:nvSpPr>
@@ -15391,7 +16958,7 @@
       </p:sp>
       <p:graphicFrame>
         <p:nvGraphicFramePr>
-          <p:cNvPr id="178" name="Google Shape;178;p20"/>
+          <p:cNvPr id="197" name="Google Shape;197;p21"/>
           <p:cNvGraphicFramePr/>
           <p:nvPr/>
         </p:nvGraphicFramePr>
@@ -15404,7 +16971,7 @@
             <a:tbl>
               <a:tblPr bandRow="1" firstRow="1">
                 <a:noFill/>
-                <a:tableStyleId>{A62805C1-FC7F-43D6-AE20-CE41A351C394}</a:tableStyleId>
+                <a:tableStyleId>{80B100E6-5FE3-4F4E-B15D-0814346C4D85}</a:tableStyleId>
               </a:tblPr>
               <a:tblGrid>
                 <a:gridCol w="2817900"/>
@@ -16960,7 +18527,7 @@
       </p:graphicFrame>
       <p:sp>
         <p:nvSpPr>
-          <p:cNvPr id="179" name="Google Shape;179;p20"/>
+          <p:cNvPr id="198" name="Google Shape;198;p21"/>
           <p:cNvSpPr/>
           <p:nvPr/>
         </p:nvSpPr>
@@ -17011,7 +18578,7 @@
       </p:sp>
       <p:sp>
         <p:nvSpPr>
-          <p:cNvPr id="180" name="Google Shape;180;p20"/>
+          <p:cNvPr id="199" name="Google Shape;199;p21"/>
           <p:cNvSpPr/>
           <p:nvPr/>
         </p:nvSpPr>
@@ -17062,7 +18629,7 @@
       </p:sp>
       <p:sp>
         <p:nvSpPr>
-          <p:cNvPr id="181" name="Google Shape;181;p20"/>
+          <p:cNvPr id="200" name="Google Shape;200;p21"/>
           <p:cNvSpPr/>
           <p:nvPr/>
         </p:nvSpPr>
@@ -17113,7 +18680,7 @@
       </p:sp>
       <p:sp>
         <p:nvSpPr>
-          <p:cNvPr id="182" name="Google Shape;182;p20"/>
+          <p:cNvPr id="201" name="Google Shape;201;p21"/>
           <p:cNvSpPr/>
           <p:nvPr/>
         </p:nvSpPr>
@@ -17164,7 +18731,7 @@
       </p:sp>
       <p:sp>
         <p:nvSpPr>
-          <p:cNvPr id="183" name="Google Shape;183;p20"/>
+          <p:cNvPr id="202" name="Google Shape;202;p21"/>
           <p:cNvSpPr/>
           <p:nvPr/>
         </p:nvSpPr>
@@ -17215,7 +18782,7 @@
       </p:sp>
       <p:sp>
         <p:nvSpPr>
-          <p:cNvPr id="184" name="Google Shape;184;p20"/>
+          <p:cNvPr id="203" name="Google Shape;203;p21"/>
           <p:cNvSpPr/>
           <p:nvPr/>
         </p:nvSpPr>
@@ -17266,7 +18833,7 @@
       </p:sp>
       <p:sp>
         <p:nvSpPr>
-          <p:cNvPr id="185" name="Google Shape;185;p20"/>
+          <p:cNvPr id="204" name="Google Shape;204;p21"/>
           <p:cNvSpPr/>
           <p:nvPr/>
         </p:nvSpPr>
@@ -17317,7 +18884,7 @@
       </p:sp>
       <p:sp>
         <p:nvSpPr>
-          <p:cNvPr id="186" name="Google Shape;186;p20"/>
+          <p:cNvPr id="205" name="Google Shape;205;p21"/>
           <p:cNvSpPr/>
           <p:nvPr/>
         </p:nvSpPr>
@@ -17368,7 +18935,7 @@
       </p:sp>
       <p:sp>
         <p:nvSpPr>
-          <p:cNvPr id="187" name="Google Shape;187;p20"/>
+          <p:cNvPr id="206" name="Google Shape;206;p21"/>
           <p:cNvSpPr/>
           <p:nvPr/>
         </p:nvSpPr>
@@ -17419,7 +18986,7 @@
       </p:sp>
       <p:sp>
         <p:nvSpPr>
-          <p:cNvPr id="188" name="Google Shape;188;p20"/>
+          <p:cNvPr id="207" name="Google Shape;207;p21"/>
           <p:cNvSpPr/>
           <p:nvPr/>
         </p:nvSpPr>
@@ -17470,7 +19037,7 @@
       </p:sp>
       <p:sp>
         <p:nvSpPr>
-          <p:cNvPr id="189" name="Google Shape;189;p20"/>
+          <p:cNvPr id="208" name="Google Shape;208;p21"/>
           <p:cNvSpPr/>
           <p:nvPr/>
         </p:nvSpPr>
@@ -17521,7 +19088,7 @@
       </p:sp>
       <p:sp>
         <p:nvSpPr>
-          <p:cNvPr id="190" name="Google Shape;190;p20"/>
+          <p:cNvPr id="209" name="Google Shape;209;p21"/>
           <p:cNvSpPr/>
           <p:nvPr/>
         </p:nvSpPr>
@@ -17572,7 +19139,7 @@
       </p:sp>
       <p:sp>
         <p:nvSpPr>
-          <p:cNvPr id="191" name="Google Shape;191;p20"/>
+          <p:cNvPr id="210" name="Google Shape;210;p21"/>
           <p:cNvSpPr/>
           <p:nvPr/>
         </p:nvSpPr>
@@ -17623,7 +19190,7 @@
       </p:sp>
       <p:sp>
         <p:nvSpPr>
-          <p:cNvPr id="192" name="Google Shape;192;p20"/>
+          <p:cNvPr id="211" name="Google Shape;211;p21"/>
           <p:cNvSpPr/>
           <p:nvPr/>
         </p:nvSpPr>
@@ -17674,7 +19241,7 @@
       </p:sp>
       <p:sp>
         <p:nvSpPr>
-          <p:cNvPr id="193" name="Google Shape;193;p20"/>
+          <p:cNvPr id="212" name="Google Shape;212;p21"/>
           <p:cNvSpPr/>
           <p:nvPr/>
         </p:nvSpPr>
@@ -17725,7 +19292,7 @@
       </p:sp>
       <p:sp>
         <p:nvSpPr>
-          <p:cNvPr id="194" name="Google Shape;194;p20"/>
+          <p:cNvPr id="213" name="Google Shape;213;p21"/>
           <p:cNvSpPr/>
           <p:nvPr/>
         </p:nvSpPr>
@@ -17776,7 +19343,7 @@
       </p:sp>
       <p:sp>
         <p:nvSpPr>
-          <p:cNvPr id="195" name="Google Shape;195;p20"/>
+          <p:cNvPr id="214" name="Google Shape;214;p21"/>
           <p:cNvSpPr/>
           <p:nvPr/>
         </p:nvSpPr>
@@ -17827,7 +19394,7 @@
       </p:sp>
       <p:sp>
         <p:nvSpPr>
-          <p:cNvPr id="196" name="Google Shape;196;p20"/>
+          <p:cNvPr id="215" name="Google Shape;215;p21"/>
           <p:cNvSpPr/>
           <p:nvPr/>
         </p:nvSpPr>
@@ -17878,7 +19445,7 @@
       </p:sp>
       <p:sp>
         <p:nvSpPr>
-          <p:cNvPr id="197" name="Google Shape;197;p20"/>
+          <p:cNvPr id="216" name="Google Shape;216;p21"/>
           <p:cNvSpPr/>
           <p:nvPr/>
         </p:nvSpPr>
@@ -17929,7 +19496,7 @@
       </p:sp>
       <p:sp>
         <p:nvSpPr>
-          <p:cNvPr id="198" name="Google Shape;198;p20"/>
+          <p:cNvPr id="217" name="Google Shape;217;p21"/>
           <p:cNvSpPr/>
           <p:nvPr/>
         </p:nvSpPr>
@@ -17980,7 +19547,7 @@
       </p:sp>
       <p:sp>
         <p:nvSpPr>
-          <p:cNvPr id="199" name="Google Shape;199;p20"/>
+          <p:cNvPr id="218" name="Google Shape;218;p21"/>
           <p:cNvSpPr txBox="1"/>
           <p:nvPr/>
         </p:nvSpPr>
@@ -18036,815 +19603,286 @@
 </p:sld>
 </file>
 
-<file path=ppt/slides/slide9.xml><?xml version="1.0" encoding="utf-8"?>
-<p:sld xmlns:a="http://schemas.openxmlformats.org/drawingml/2006/main" xmlns:r="http://schemas.openxmlformats.org/officeDocument/2006/relationships" xmlns:mc="http://schemas.openxmlformats.org/markup-compatibility/2006" xmlns:mv="urn:schemas-microsoft-com:mac:vml" xmlns:p="http://schemas.openxmlformats.org/presentationml/2006/main" xmlns:c="http://schemas.openxmlformats.org/drawingml/2006/chart" xmlns:dgm="http://schemas.openxmlformats.org/drawingml/2006/diagram" xmlns:o="urn:schemas-microsoft-com:office:office" xmlns:v="urn:schemas-microsoft-com:vml" xmlns:pvml="urn:schemas-microsoft-com:office:powerpoint" xmlns:com="http://schemas.openxmlformats.org/drawingml/2006/compatibility" xmlns:p14="http://schemas.microsoft.com/office/powerpoint/2010/main" xmlns:p15="http://schemas.microsoft.com/office/powerpoint/2012/main" xmlns:ahyp="http://schemas.microsoft.com/office/drawing/2018/hyperlinkcolor">
-  <p:cSld>
-    <p:bg>
-      <p:bgPr>
+<file path=ppt/theme/theme1.xml><?xml version="1.0" encoding="utf-8"?>
+<a:theme xmlns:a="http://schemas.openxmlformats.org/drawingml/2006/main" xmlns:r="http://schemas.openxmlformats.org/officeDocument/2006/relationships">
+  <a:themeElements>
+    <a:clrScheme name="Default">
+      <a:dk1>
+        <a:srgbClr val="000000"/>
+      </a:dk1>
+      <a:lt1>
+        <a:srgbClr val="FFFFFF"/>
+      </a:lt1>
+      <a:dk2>
+        <a:srgbClr val="158158"/>
+      </a:dk2>
+      <a:lt2>
+        <a:srgbClr val="F3F3F3"/>
+      </a:lt2>
+      <a:accent1>
+        <a:srgbClr val="058DC7"/>
+      </a:accent1>
+      <a:accent2>
+        <a:srgbClr val="50B432"/>
+      </a:accent2>
+      <a:accent3>
+        <a:srgbClr val="ED561B"/>
+      </a:accent3>
+      <a:accent4>
+        <a:srgbClr val="EDEF00"/>
+      </a:accent4>
+      <a:accent5>
+        <a:srgbClr val="24CBE5"/>
+      </a:accent5>
+      <a:accent6>
+        <a:srgbClr val="64E572"/>
+      </a:accent6>
+      <a:hlink>
+        <a:srgbClr val="2200CC"/>
+      </a:hlink>
+      <a:folHlink>
+        <a:srgbClr val="551A8B"/>
+      </a:folHlink>
+    </a:clrScheme>
+    <a:fontScheme name="Office">
+      <a:majorFont>
+        <a:latin typeface="Arial"/>
+        <a:ea typeface=""/>
+        <a:cs typeface=""/>
+        <a:font script="Jpan" typeface="ＭＳ Ｐゴシック"/>
+        <a:font script="Hang" typeface="맑은 고딕"/>
+        <a:font script="Hans" typeface="宋体"/>
+        <a:font script="Hant" typeface="新細明體"/>
+        <a:font script="Arab" typeface="Times New Roman"/>
+        <a:font script="Hebr" typeface="Times New Roman"/>
+        <a:font script="Thai" typeface="Angsana New"/>
+        <a:font script="Ethi" typeface="Nyala"/>
+        <a:font script="Beng" typeface="Vrinda"/>
+        <a:font script="Gujr" typeface="Shruti"/>
+        <a:font script="Khmr" typeface="MoolBoran"/>
+        <a:font script="Knda" typeface="Tunga"/>
+        <a:font script="Guru" typeface="Raavi"/>
+        <a:font script="Cans" typeface="Euphemia"/>
+        <a:font script="Cher" typeface="Plantagenet Cherokee"/>
+        <a:font script="Yiii" typeface="Microsoft Yi Baiti"/>
+        <a:font script="Tibt" typeface="Microsoft Himalaya"/>
+        <a:font script="Thaa" typeface="MV Boli"/>
+        <a:font script="Deva" typeface="Mangal"/>
+        <a:font script="Telu" typeface="Gautami"/>
+        <a:font script="Taml" typeface="Latha"/>
+        <a:font script="Syrc" typeface="Estrangelo Edessa"/>
+        <a:font script="Orya" typeface="Kalinga"/>
+        <a:font script="Mlym" typeface="Kartika"/>
+        <a:font script="Laoo" typeface="DokChampa"/>
+        <a:font script="Sinh" typeface="Iskoola Pota"/>
+        <a:font script="Mong" typeface="Mongolian Baiti"/>
+        <a:font script="Viet" typeface="Times New Roman"/>
+        <a:font script="Uigh" typeface="Microsoft Uighur"/>
+        <a:font script="Geor" typeface="Sylfaen"/>
+      </a:majorFont>
+      <a:minorFont>
+        <a:latin typeface="Arial"/>
+        <a:ea typeface=""/>
+        <a:cs typeface=""/>
+        <a:font script="Jpan" typeface="ＭＳ Ｐゴシック"/>
+        <a:font script="Hang" typeface="맑은 고딕"/>
+        <a:font script="Hans" typeface="宋体"/>
+        <a:font script="Hant" typeface="新細明體"/>
+        <a:font script="Arab" typeface="Arial"/>
+        <a:font script="Hebr" typeface="Arial"/>
+        <a:font script="Thai" typeface="Cordia New"/>
+        <a:font script="Ethi" typeface="Nyala"/>
+        <a:font script="Beng" typeface="Vrinda"/>
+        <a:font script="Gujr" typeface="Shruti"/>
+        <a:font script="Khmr" typeface="DaunPenh"/>
+        <a:font script="Knda" typeface="Tunga"/>
+        <a:font script="Guru" typeface="Raavi"/>
+        <a:font script="Cans" typeface="Euphemia"/>
+        <a:font script="Cher" typeface="Plantagenet Cherokee"/>
+        <a:font script="Yiii" typeface="Microsoft Yi Baiti"/>
+        <a:font script="Tibt" typeface="Microsoft Himalaya"/>
+        <a:font script="Thaa" typeface="MV Boli"/>
+        <a:font script="Deva" typeface="Mangal"/>
+        <a:font script="Telu" typeface="Gautami"/>
+        <a:font script="Taml" typeface="Latha"/>
+        <a:font script="Syrc" typeface="Estrangelo Edessa"/>
+        <a:font script="Orya" typeface="Kalinga"/>
+        <a:font script="Mlym" typeface="Kartika"/>
+        <a:font script="Laoo" typeface="DokChampa"/>
+        <a:font script="Sinh" typeface="Iskoola Pota"/>
+        <a:font script="Mong" typeface="Mongolian Baiti"/>
+        <a:font script="Viet" typeface="Arial"/>
+        <a:font script="Uigh" typeface="Microsoft Uighur"/>
+        <a:font script="Geor" typeface="Sylfaen"/>
+      </a:minorFont>
+    </a:fontScheme>
+    <a:fmtScheme name="Office">
+      <a:fillStyleLst>
         <a:solidFill>
-          <a:srgbClr val="FFFFFF"/>
+          <a:schemeClr val="phClr"/>
         </a:solidFill>
-      </p:bgPr>
-    </p:bg>
-    <p:spTree>
-      <p:nvGrpSpPr>
-        <p:cNvPr id="203" name="Shape 203"/>
-        <p:cNvGrpSpPr/>
-        <p:nvPr/>
-      </p:nvGrpSpPr>
-      <p:grpSpPr>
-        <a:xfrm>
-          <a:off x="0" y="0"/>
-          <a:ext cx="0" cy="0"/>
-          <a:chOff x="0" y="0"/>
-          <a:chExt cx="0" cy="0"/>
-        </a:xfrm>
-      </p:grpSpPr>
-      <p:pic>
-        <p:nvPicPr>
-          <p:cNvPr descr="image.png" id="204" name="Google Shape;204;p21"/>
-          <p:cNvPicPr preferRelativeResize="0"/>
-          <p:nvPr/>
-        </p:nvPicPr>
-        <p:blipFill rotWithShape="1">
-          <a:blip r:embed="rId3">
-            <a:alphaModFix/>
-          </a:blip>
-          <a:srcRect b="0" l="0" r="0" t="0"/>
-          <a:stretch/>
-        </p:blipFill>
-        <p:spPr>
-          <a:xfrm>
-            <a:off x="0" y="0"/>
-            <a:ext cx="12192000" cy="6858000"/>
-          </a:xfrm>
-          <a:prstGeom prst="rect">
-            <a:avLst/>
-          </a:prstGeom>
-          <a:noFill/>
-          <a:ln>
-            <a:noFill/>
-          </a:ln>
-        </p:spPr>
-      </p:pic>
-      <p:sp>
-        <p:nvSpPr>
-          <p:cNvPr id="205" name="Google Shape;205;p21"/>
-          <p:cNvSpPr/>
-          <p:nvPr/>
-        </p:nvSpPr>
-        <p:spPr>
-          <a:xfrm>
-            <a:off x="571500" y="3871912"/>
-            <a:ext cx="11049000" cy="38100"/>
-          </a:xfrm>
-          <a:prstGeom prst="rect">
-            <a:avLst/>
-          </a:prstGeom>
+        <a:gradFill rotWithShape="1">
+          <a:gsLst>
+            <a:gs pos="0">
+              <a:schemeClr val="phClr">
+                <a:tint val="50000"/>
+                <a:satMod val="300000"/>
+              </a:schemeClr>
+            </a:gs>
+            <a:gs pos="35000">
+              <a:schemeClr val="phClr">
+                <a:tint val="37000"/>
+                <a:satMod val="300000"/>
+              </a:schemeClr>
+            </a:gs>
+            <a:gs pos="100000">
+              <a:schemeClr val="phClr">
+                <a:tint val="15000"/>
+                <a:satMod val="350000"/>
+              </a:schemeClr>
+            </a:gs>
+          </a:gsLst>
+          <a:lin ang="16200000" scaled="1"/>
+        </a:gradFill>
+        <a:gradFill rotWithShape="1">
+          <a:gsLst>
+            <a:gs pos="0">
+              <a:schemeClr val="phClr">
+                <a:tint val="100000"/>
+                <a:shade val="100000"/>
+                <a:satMod val="130000"/>
+              </a:schemeClr>
+            </a:gs>
+            <a:gs pos="100000">
+              <a:schemeClr val="phClr">
+                <a:tint val="50000"/>
+                <a:shade val="100000"/>
+                <a:satMod val="350000"/>
+              </a:schemeClr>
+            </a:gs>
+          </a:gsLst>
+          <a:lin ang="16200000" scaled="0"/>
+        </a:gradFill>
+      </a:fillStyleLst>
+      <a:lnStyleLst>
+        <a:ln w="9525" cap="flat" cmpd="sng" algn="ctr">
           <a:solidFill>
-            <a:srgbClr val="E2E8F0"/>
+            <a:schemeClr val="phClr">
+              <a:shade val="95000"/>
+              <a:satMod val="105000"/>
+            </a:schemeClr>
           </a:solidFill>
-          <a:ln>
-            <a:noFill/>
-          </a:ln>
-        </p:spPr>
-        <p:txBody>
-          <a:bodyPr anchorCtr="0" anchor="ctr" bIns="45700" lIns="91425" spcFirstLastPara="1" rIns="91425" wrap="square" tIns="45700">
-            <a:noAutofit/>
-          </a:bodyPr>
-          <a:lstStyle/>
-          <a:p>
-            <a:pPr indent="0" lvl="0" marL="0" marR="0" rtl="0" algn="ctr">
-              <a:spcBef>
-                <a:spcPts val="0"/>
-              </a:spcBef>
-              <a:spcAft>
-                <a:spcPts val="0"/>
-              </a:spcAft>
-              <a:buNone/>
-            </a:pPr>
-            <a:r>
-              <a:t/>
-            </a:r>
-            <a:endParaRPr b="0" i="0" sz="1800" u="none" cap="none" strike="noStrike">
-              <a:solidFill>
-                <a:schemeClr val="dk1"/>
-              </a:solidFill>
-              <a:latin typeface="Calibri"/>
-              <a:ea typeface="Calibri"/>
-              <a:cs typeface="Calibri"/>
-              <a:sym typeface="Calibri"/>
-            </a:endParaRPr>
-          </a:p>
-        </p:txBody>
-      </p:sp>
-      <p:sp>
-        <p:nvSpPr>
-          <p:cNvPr id="206" name="Google Shape;206;p21"/>
-          <p:cNvSpPr txBox="1"/>
-          <p:nvPr/>
-        </p:nvSpPr>
-        <p:spPr>
-          <a:xfrm>
-            <a:off x="510733" y="4354710"/>
-            <a:ext cx="2552193" cy="400050"/>
-          </a:xfrm>
-          <a:prstGeom prst="rect">
-            <a:avLst/>
-          </a:prstGeom>
-          <a:noFill/>
-          <a:ln>
-            <a:noFill/>
-          </a:ln>
-        </p:spPr>
-        <p:txBody>
-          <a:bodyPr anchorCtr="0" anchor="t" bIns="0" lIns="0" spcFirstLastPara="1" rIns="0" wrap="square" tIns="0">
-            <a:spAutoFit/>
-          </a:bodyPr>
-          <a:lstStyle/>
-          <a:p>
-            <a:pPr indent="0" lvl="0" marL="0" marR="0" rtl="0" algn="ctr">
-              <a:spcBef>
-                <a:spcPts val="0"/>
-              </a:spcBef>
-              <a:spcAft>
-                <a:spcPts val="0"/>
-              </a:spcAft>
-              <a:buNone/>
-            </a:pPr>
-            <a:r>
-              <a:rPr b="1" i="0" lang="en-US" sz="2100" u="none" cap="none" strike="noStrike">
-                <a:solidFill>
-                  <a:srgbClr val="1E293B"/>
-                </a:solidFill>
-                <a:latin typeface="Poppins"/>
-                <a:ea typeface="Poppins"/>
-                <a:cs typeface="Poppins"/>
-                <a:sym typeface="Poppins"/>
-              </a:rPr>
-              <a:t>Leitura de 'a'</a:t>
-            </a:r>
-            <a:endParaRPr/>
-          </a:p>
-        </p:txBody>
-      </p:sp>
-      <p:sp>
-        <p:nvSpPr>
-          <p:cNvPr id="207" name="Google Shape;207;p21"/>
-          <p:cNvSpPr txBox="1"/>
-          <p:nvPr/>
-        </p:nvSpPr>
-        <p:spPr>
-          <a:xfrm>
-            <a:off x="571500" y="4945260"/>
-            <a:ext cx="2430660" cy="609600"/>
-          </a:xfrm>
-          <a:prstGeom prst="rect">
-            <a:avLst/>
-          </a:prstGeom>
-          <a:noFill/>
-          <a:ln>
-            <a:noFill/>
-          </a:ln>
-        </p:spPr>
-        <p:txBody>
-          <a:bodyPr anchorCtr="0" anchor="t" bIns="0" lIns="0" spcFirstLastPara="1" rIns="0" wrap="square" tIns="0">
-            <a:spAutoFit/>
-          </a:bodyPr>
-          <a:lstStyle/>
-          <a:p>
-            <a:pPr indent="0" lvl="0" marL="0" marR="0" rtl="0" algn="ctr">
-              <a:lnSpc>
-                <a:spcPct val="160000"/>
-              </a:lnSpc>
-              <a:spcBef>
-                <a:spcPts val="0"/>
-              </a:spcBef>
-              <a:spcAft>
-                <a:spcPts val="0"/>
-              </a:spcAft>
-              <a:buNone/>
-            </a:pPr>
-            <a:r>
-              <a:rPr b="0" i="0" lang="en-US" sz="1500" u="none" cap="none" strike="noStrike">
-                <a:solidFill>
-                  <a:srgbClr val="475569"/>
-                </a:solidFill>
-                <a:latin typeface="Lato"/>
-                <a:ea typeface="Lato"/>
-                <a:cs typeface="Lato"/>
-                <a:sym typeface="Lato"/>
-              </a:rPr>
-              <a:t>Enquanto lê 'a', empilha 'X' na Pilha 1.</a:t>
-            </a:r>
-            <a:endParaRPr/>
-          </a:p>
-        </p:txBody>
-      </p:sp>
-      <p:sp>
-        <p:nvSpPr>
-          <p:cNvPr id="208" name="Google Shape;208;p21"/>
-          <p:cNvSpPr txBox="1"/>
-          <p:nvPr/>
-        </p:nvSpPr>
-        <p:spPr>
-          <a:xfrm>
-            <a:off x="3383413" y="1998464"/>
-            <a:ext cx="2552193" cy="400050"/>
-          </a:xfrm>
-          <a:prstGeom prst="rect">
-            <a:avLst/>
-          </a:prstGeom>
-          <a:noFill/>
-          <a:ln>
-            <a:noFill/>
-          </a:ln>
-        </p:spPr>
-        <p:txBody>
-          <a:bodyPr anchorCtr="0" anchor="t" bIns="0" lIns="0" spcFirstLastPara="1" rIns="0" wrap="square" tIns="0">
-            <a:spAutoFit/>
-          </a:bodyPr>
-          <a:lstStyle/>
-          <a:p>
-            <a:pPr indent="0" lvl="0" marL="0" marR="0" rtl="0" algn="ctr">
-              <a:spcBef>
-                <a:spcPts val="0"/>
-              </a:spcBef>
-              <a:spcAft>
-                <a:spcPts val="0"/>
-              </a:spcAft>
-              <a:buNone/>
-            </a:pPr>
-            <a:r>
-              <a:rPr b="1" i="0" lang="en-US" sz="2100" u="none" cap="none" strike="noStrike">
-                <a:solidFill>
-                  <a:srgbClr val="1E293B"/>
-                </a:solidFill>
-                <a:latin typeface="Poppins"/>
-                <a:ea typeface="Poppins"/>
-                <a:cs typeface="Poppins"/>
-                <a:sym typeface="Poppins"/>
-              </a:rPr>
-              <a:t>Leitura de 'b'</a:t>
-            </a:r>
-            <a:endParaRPr/>
-          </a:p>
-        </p:txBody>
-      </p:sp>
-      <p:sp>
-        <p:nvSpPr>
-          <p:cNvPr id="209" name="Google Shape;209;p21"/>
-          <p:cNvSpPr txBox="1"/>
-          <p:nvPr/>
-        </p:nvSpPr>
-        <p:spPr>
-          <a:xfrm>
-            <a:off x="3444180" y="2589014"/>
-            <a:ext cx="2430660" cy="609600"/>
-          </a:xfrm>
-          <a:prstGeom prst="rect">
-            <a:avLst/>
-          </a:prstGeom>
-          <a:noFill/>
-          <a:ln>
-            <a:noFill/>
-          </a:ln>
-        </p:spPr>
-        <p:txBody>
-          <a:bodyPr anchorCtr="0" anchor="t" bIns="0" lIns="0" spcFirstLastPara="1" rIns="0" wrap="square" tIns="0">
-            <a:spAutoFit/>
-          </a:bodyPr>
-          <a:lstStyle/>
-          <a:p>
-            <a:pPr indent="0" lvl="0" marL="0" marR="0" rtl="0" algn="ctr">
-              <a:lnSpc>
-                <a:spcPct val="160000"/>
-              </a:lnSpc>
-              <a:spcBef>
-                <a:spcPts val="0"/>
-              </a:spcBef>
-              <a:spcAft>
-                <a:spcPts val="0"/>
-              </a:spcAft>
-              <a:buNone/>
-            </a:pPr>
-            <a:r>
-              <a:rPr b="0" i="0" lang="en-US" sz="1500" u="none" cap="none" strike="noStrike">
-                <a:solidFill>
-                  <a:srgbClr val="475569"/>
-                </a:solidFill>
-                <a:latin typeface="Lato"/>
-                <a:ea typeface="Lato"/>
-                <a:cs typeface="Lato"/>
-                <a:sym typeface="Lato"/>
-              </a:rPr>
-              <a:t>Enquanto lê 'b', empilha 'Y' na Pilha 2.</a:t>
-            </a:r>
-            <a:endParaRPr/>
-          </a:p>
-        </p:txBody>
-      </p:sp>
-      <p:sp>
-        <p:nvSpPr>
-          <p:cNvPr id="210" name="Google Shape;210;p21"/>
-          <p:cNvSpPr txBox="1"/>
-          <p:nvPr/>
-        </p:nvSpPr>
-        <p:spPr>
-          <a:xfrm>
-            <a:off x="6256094" y="4354710"/>
-            <a:ext cx="2552193" cy="400050"/>
-          </a:xfrm>
-          <a:prstGeom prst="rect">
-            <a:avLst/>
-          </a:prstGeom>
-          <a:noFill/>
-          <a:ln>
-            <a:noFill/>
-          </a:ln>
-        </p:spPr>
-        <p:txBody>
-          <a:bodyPr anchorCtr="0" anchor="t" bIns="0" lIns="0" spcFirstLastPara="1" rIns="0" wrap="square" tIns="0">
-            <a:spAutoFit/>
-          </a:bodyPr>
-          <a:lstStyle/>
-          <a:p>
-            <a:pPr indent="0" lvl="0" marL="0" marR="0" rtl="0" algn="ctr">
-              <a:spcBef>
-                <a:spcPts val="0"/>
-              </a:spcBef>
-              <a:spcAft>
-                <a:spcPts val="0"/>
-              </a:spcAft>
-              <a:buNone/>
-            </a:pPr>
-            <a:r>
-              <a:rPr b="1" i="0" lang="en-US" sz="2100" u="none" cap="none" strike="noStrike">
-                <a:solidFill>
-                  <a:srgbClr val="1E293B"/>
-                </a:solidFill>
-                <a:latin typeface="Poppins"/>
-                <a:ea typeface="Poppins"/>
-                <a:cs typeface="Poppins"/>
-                <a:sym typeface="Poppins"/>
-              </a:rPr>
-              <a:t>Verificação 'c'</a:t>
-            </a:r>
-            <a:endParaRPr/>
-          </a:p>
-        </p:txBody>
-      </p:sp>
-      <p:sp>
-        <p:nvSpPr>
-          <p:cNvPr id="211" name="Google Shape;211;p21"/>
-          <p:cNvSpPr txBox="1"/>
-          <p:nvPr/>
-        </p:nvSpPr>
-        <p:spPr>
-          <a:xfrm>
-            <a:off x="6316860" y="4945260"/>
-            <a:ext cx="2430660" cy="609600"/>
-          </a:xfrm>
-          <a:prstGeom prst="rect">
-            <a:avLst/>
-          </a:prstGeom>
-          <a:noFill/>
-          <a:ln>
-            <a:noFill/>
-          </a:ln>
-        </p:spPr>
-        <p:txBody>
-          <a:bodyPr anchorCtr="0" anchor="t" bIns="0" lIns="0" spcFirstLastPara="1" rIns="0" wrap="square" tIns="0">
-            <a:spAutoFit/>
-          </a:bodyPr>
-          <a:lstStyle/>
-          <a:p>
-            <a:pPr indent="0" lvl="0" marL="0" marR="0" rtl="0" algn="ctr">
-              <a:lnSpc>
-                <a:spcPct val="160000"/>
-              </a:lnSpc>
-              <a:spcBef>
-                <a:spcPts val="0"/>
-              </a:spcBef>
-              <a:spcAft>
-                <a:spcPts val="0"/>
-              </a:spcAft>
-              <a:buNone/>
-            </a:pPr>
-            <a:r>
-              <a:rPr b="0" i="0" lang="en-US" sz="1500" u="none" cap="none" strike="noStrike">
-                <a:solidFill>
-                  <a:srgbClr val="475569"/>
-                </a:solidFill>
-                <a:latin typeface="Lato"/>
-                <a:ea typeface="Lato"/>
-                <a:cs typeface="Lato"/>
-                <a:sym typeface="Lato"/>
-              </a:rPr>
-              <a:t>Lê 'c', desempilha 'X' da P1 e 'Y' da P2 simultaneamente.</a:t>
-            </a:r>
-            <a:endParaRPr/>
-          </a:p>
-        </p:txBody>
-      </p:sp>
-      <p:sp>
-        <p:nvSpPr>
-          <p:cNvPr id="212" name="Google Shape;212;p21"/>
-          <p:cNvSpPr txBox="1"/>
-          <p:nvPr/>
-        </p:nvSpPr>
-        <p:spPr>
-          <a:xfrm>
-            <a:off x="9128774" y="1693664"/>
-            <a:ext cx="2552193" cy="400050"/>
-          </a:xfrm>
-          <a:prstGeom prst="rect">
-            <a:avLst/>
-          </a:prstGeom>
-          <a:noFill/>
-          <a:ln>
-            <a:noFill/>
-          </a:ln>
-        </p:spPr>
-        <p:txBody>
-          <a:bodyPr anchorCtr="0" anchor="t" bIns="0" lIns="0" spcFirstLastPara="1" rIns="0" wrap="square" tIns="0">
-            <a:spAutoFit/>
-          </a:bodyPr>
-          <a:lstStyle/>
-          <a:p>
-            <a:pPr indent="0" lvl="0" marL="0" marR="0" rtl="0" algn="ctr">
-              <a:spcBef>
-                <a:spcPts val="0"/>
-              </a:spcBef>
-              <a:spcAft>
-                <a:spcPts val="0"/>
-              </a:spcAft>
-              <a:buNone/>
-            </a:pPr>
-            <a:r>
-              <a:rPr b="1" i="0" lang="en-US" sz="2100" u="none" cap="none" strike="noStrike">
-                <a:solidFill>
-                  <a:srgbClr val="1E293B"/>
-                </a:solidFill>
-                <a:latin typeface="Poppins"/>
-                <a:ea typeface="Poppins"/>
-                <a:cs typeface="Poppins"/>
-                <a:sym typeface="Poppins"/>
-              </a:rPr>
-              <a:t>Aceitação</a:t>
-            </a:r>
-            <a:endParaRPr/>
-          </a:p>
-        </p:txBody>
-      </p:sp>
-      <p:sp>
-        <p:nvSpPr>
-          <p:cNvPr id="213" name="Google Shape;213;p21"/>
-          <p:cNvSpPr txBox="1"/>
-          <p:nvPr/>
-        </p:nvSpPr>
-        <p:spPr>
-          <a:xfrm>
-            <a:off x="9189541" y="2284214"/>
-            <a:ext cx="2430660" cy="914400"/>
-          </a:xfrm>
-          <a:prstGeom prst="rect">
-            <a:avLst/>
-          </a:prstGeom>
-          <a:noFill/>
-          <a:ln>
-            <a:noFill/>
-          </a:ln>
-        </p:spPr>
-        <p:txBody>
-          <a:bodyPr anchorCtr="0" anchor="t" bIns="0" lIns="0" spcFirstLastPara="1" rIns="0" wrap="square" tIns="0">
-            <a:spAutoFit/>
-          </a:bodyPr>
-          <a:lstStyle/>
-          <a:p>
-            <a:pPr indent="0" lvl="0" marL="0" marR="0" rtl="0" algn="ctr">
-              <a:lnSpc>
-                <a:spcPct val="160000"/>
-              </a:lnSpc>
-              <a:spcBef>
-                <a:spcPts val="0"/>
-              </a:spcBef>
-              <a:spcAft>
-                <a:spcPts val="0"/>
-              </a:spcAft>
-              <a:buNone/>
-            </a:pPr>
-            <a:r>
-              <a:rPr b="0" i="0" lang="en-US" sz="1500" u="none" cap="none" strike="noStrike">
-                <a:solidFill>
-                  <a:srgbClr val="475569"/>
-                </a:solidFill>
-                <a:latin typeface="Lato"/>
-                <a:ea typeface="Lato"/>
-                <a:cs typeface="Lato"/>
-                <a:sym typeface="Lato"/>
-              </a:rPr>
-              <a:t>Se ambas as pilhas esvaziarem ao fim da cadeia, aceite.</a:t>
-            </a:r>
-            <a:endParaRPr/>
-          </a:p>
-        </p:txBody>
-      </p:sp>
-      <p:sp>
-        <p:nvSpPr>
-          <p:cNvPr id="214" name="Google Shape;214;p21"/>
-          <p:cNvSpPr txBox="1"/>
-          <p:nvPr/>
-        </p:nvSpPr>
-        <p:spPr>
-          <a:xfrm>
-            <a:off x="571500" y="571500"/>
-            <a:ext cx="11601450" cy="600075"/>
-          </a:xfrm>
-          <a:prstGeom prst="rect">
-            <a:avLst/>
-          </a:prstGeom>
-          <a:noFill/>
-          <a:ln>
-            <a:noFill/>
-          </a:ln>
-        </p:spPr>
-        <p:txBody>
-          <a:bodyPr anchorCtr="0" anchor="t" bIns="0" lIns="0" spcFirstLastPara="1" rIns="0" wrap="square" tIns="0">
-            <a:spAutoFit/>
-          </a:bodyPr>
-          <a:lstStyle/>
-          <a:p>
-            <a:pPr indent="0" lvl="0" marL="0" marR="0" rtl="0" algn="l">
-              <a:spcBef>
-                <a:spcPts val="0"/>
-              </a:spcBef>
-              <a:spcAft>
-                <a:spcPts val="0"/>
-              </a:spcAft>
-              <a:buNone/>
-            </a:pPr>
-            <a:r>
-              <a:rPr b="1" i="0" lang="en-US" sz="3150" u="none" cap="none" strike="noStrike">
-                <a:solidFill>
-                  <a:srgbClr val="0D9488"/>
-                </a:solidFill>
-                <a:latin typeface="Poppins"/>
-                <a:ea typeface="Poppins"/>
-                <a:cs typeface="Poppins"/>
-                <a:sym typeface="Poppins"/>
-              </a:rPr>
-              <a:t>Exemplo: Reconhecendo {aⁿbⁿcⁿ}</a:t>
-            </a:r>
-            <a:endParaRPr/>
-          </a:p>
-        </p:txBody>
-      </p:sp>
-      <p:sp>
-        <p:nvSpPr>
-          <p:cNvPr id="215" name="Google Shape;215;p21"/>
-          <p:cNvSpPr/>
-          <p:nvPr/>
-        </p:nvSpPr>
-        <p:spPr>
-          <a:xfrm>
-            <a:off x="1691580" y="3776662"/>
-            <a:ext cx="190500" cy="190500"/>
-          </a:xfrm>
-          <a:prstGeom prst="roundRect">
-            <a:avLst>
-              <a:gd fmla="val 50000" name="adj"/>
-            </a:avLst>
-          </a:prstGeom>
+          <a:prstDash val="solid"/>
+        </a:ln>
+        <a:ln w="25400" cap="flat" cmpd="sng" algn="ctr">
           <a:solidFill>
-            <a:srgbClr val="0D9488"/>
+            <a:schemeClr val="phClr"/>
           </a:solidFill>
-          <a:ln cap="flat" cmpd="sng" w="38100">
-            <a:solidFill>
-              <a:srgbClr val="FFFFFF"/>
-            </a:solidFill>
-            <a:prstDash val="solid"/>
-            <a:round/>
-            <a:headEnd len="sm" w="sm" type="none"/>
-            <a:tailEnd len="sm" w="sm" type="none"/>
-          </a:ln>
-        </p:spPr>
-        <p:txBody>
-          <a:bodyPr anchorCtr="0" anchor="ctr" bIns="45700" lIns="91425" spcFirstLastPara="1" rIns="91425" wrap="square" tIns="45700">
-            <a:noAutofit/>
-          </a:bodyPr>
-          <a:lstStyle/>
-          <a:p>
-            <a:pPr indent="0" lvl="0" marL="0" marR="0" rtl="0" algn="ctr">
-              <a:spcBef>
-                <a:spcPts val="0"/>
-              </a:spcBef>
-              <a:spcAft>
-                <a:spcPts val="0"/>
-              </a:spcAft>
-              <a:buNone/>
-            </a:pPr>
-            <a:r>
-              <a:t/>
-            </a:r>
-            <a:endParaRPr b="0" i="0" sz="1800" u="none" cap="none" strike="noStrike">
-              <a:solidFill>
-                <a:schemeClr val="dk1"/>
-              </a:solidFill>
-              <a:latin typeface="Calibri"/>
-              <a:ea typeface="Calibri"/>
-              <a:cs typeface="Calibri"/>
-              <a:sym typeface="Calibri"/>
-            </a:endParaRPr>
-          </a:p>
-        </p:txBody>
-      </p:sp>
-      <p:sp>
-        <p:nvSpPr>
-          <p:cNvPr id="216" name="Google Shape;216;p21"/>
-          <p:cNvSpPr/>
-          <p:nvPr/>
-        </p:nvSpPr>
-        <p:spPr>
-          <a:xfrm>
-            <a:off x="4564260" y="3776662"/>
-            <a:ext cx="190500" cy="190500"/>
-          </a:xfrm>
-          <a:prstGeom prst="roundRect">
-            <a:avLst>
-              <a:gd fmla="val 50000" name="adj"/>
-            </a:avLst>
-          </a:prstGeom>
+          <a:prstDash val="solid"/>
+        </a:ln>
+        <a:ln w="38100" cap="flat" cmpd="sng" algn="ctr">
           <a:solidFill>
-            <a:srgbClr val="0D9488"/>
+            <a:schemeClr val="phClr"/>
           </a:solidFill>
-          <a:ln cap="flat" cmpd="sng" w="38100">
-            <a:solidFill>
-              <a:srgbClr val="FFFFFF"/>
-            </a:solidFill>
-            <a:prstDash val="solid"/>
-            <a:round/>
-            <a:headEnd len="sm" w="sm" type="none"/>
-            <a:tailEnd len="sm" w="sm" type="none"/>
-          </a:ln>
-        </p:spPr>
-        <p:txBody>
-          <a:bodyPr anchorCtr="0" anchor="ctr" bIns="45700" lIns="91425" spcFirstLastPara="1" rIns="91425" wrap="square" tIns="45700">
-            <a:noAutofit/>
-          </a:bodyPr>
-          <a:lstStyle/>
-          <a:p>
-            <a:pPr indent="0" lvl="0" marL="0" marR="0" rtl="0" algn="ctr">
-              <a:spcBef>
-                <a:spcPts val="0"/>
-              </a:spcBef>
-              <a:spcAft>
-                <a:spcPts val="0"/>
-              </a:spcAft>
-              <a:buNone/>
-            </a:pPr>
-            <a:r>
-              <a:t/>
-            </a:r>
-            <a:endParaRPr b="0" i="0" sz="1800" u="none" cap="none" strike="noStrike">
-              <a:solidFill>
-                <a:schemeClr val="dk1"/>
-              </a:solidFill>
-              <a:latin typeface="Calibri"/>
-              <a:ea typeface="Calibri"/>
-              <a:cs typeface="Calibri"/>
-              <a:sym typeface="Calibri"/>
-            </a:endParaRPr>
-          </a:p>
-        </p:txBody>
-      </p:sp>
-      <p:sp>
-        <p:nvSpPr>
-          <p:cNvPr id="217" name="Google Shape;217;p21"/>
-          <p:cNvSpPr/>
-          <p:nvPr/>
-        </p:nvSpPr>
-        <p:spPr>
-          <a:xfrm>
-            <a:off x="7436941" y="3776662"/>
-            <a:ext cx="190500" cy="190500"/>
-          </a:xfrm>
-          <a:prstGeom prst="roundRect">
-            <a:avLst>
-              <a:gd fmla="val 50000" name="adj"/>
-            </a:avLst>
-          </a:prstGeom>
-          <a:solidFill>
-            <a:srgbClr val="0D9488"/>
-          </a:solidFill>
-          <a:ln cap="flat" cmpd="sng" w="38100">
-            <a:solidFill>
-              <a:srgbClr val="FFFFFF"/>
-            </a:solidFill>
-            <a:prstDash val="solid"/>
-            <a:round/>
-            <a:headEnd len="sm" w="sm" type="none"/>
-            <a:tailEnd len="sm" w="sm" type="none"/>
-          </a:ln>
-        </p:spPr>
-        <p:txBody>
-          <a:bodyPr anchorCtr="0" anchor="ctr" bIns="45700" lIns="91425" spcFirstLastPara="1" rIns="91425" wrap="square" tIns="45700">
-            <a:noAutofit/>
-          </a:bodyPr>
-          <a:lstStyle/>
-          <a:p>
-            <a:pPr indent="0" lvl="0" marL="0" marR="0" rtl="0" algn="ctr">
-              <a:spcBef>
-                <a:spcPts val="0"/>
-              </a:spcBef>
-              <a:spcAft>
-                <a:spcPts val="0"/>
-              </a:spcAft>
-              <a:buNone/>
-            </a:pPr>
-            <a:r>
-              <a:t/>
-            </a:r>
-            <a:endParaRPr b="0" i="0" sz="1800" u="none" cap="none" strike="noStrike">
-              <a:solidFill>
-                <a:schemeClr val="dk1"/>
-              </a:solidFill>
-              <a:latin typeface="Calibri"/>
-              <a:ea typeface="Calibri"/>
-              <a:cs typeface="Calibri"/>
-              <a:sym typeface="Calibri"/>
-            </a:endParaRPr>
-          </a:p>
-        </p:txBody>
-      </p:sp>
-      <p:sp>
-        <p:nvSpPr>
-          <p:cNvPr id="218" name="Google Shape;218;p21"/>
-          <p:cNvSpPr/>
-          <p:nvPr/>
-        </p:nvSpPr>
-        <p:spPr>
-          <a:xfrm>
-            <a:off x="10309621" y="3776662"/>
-            <a:ext cx="190500" cy="190500"/>
-          </a:xfrm>
-          <a:prstGeom prst="roundRect">
-            <a:avLst>
-              <a:gd fmla="val 50000" name="adj"/>
-            </a:avLst>
-          </a:prstGeom>
-          <a:solidFill>
-            <a:srgbClr val="0D9488"/>
-          </a:solidFill>
-          <a:ln cap="flat" cmpd="sng" w="38100">
-            <a:solidFill>
-              <a:srgbClr val="FFFFFF"/>
-            </a:solidFill>
-            <a:prstDash val="solid"/>
-            <a:round/>
-            <a:headEnd len="sm" w="sm" type="none"/>
-            <a:tailEnd len="sm" w="sm" type="none"/>
-          </a:ln>
-        </p:spPr>
-        <p:txBody>
-          <a:bodyPr anchorCtr="0" anchor="ctr" bIns="45700" lIns="91425" spcFirstLastPara="1" rIns="91425" wrap="square" tIns="45700">
-            <a:noAutofit/>
-          </a:bodyPr>
-          <a:lstStyle/>
-          <a:p>
-            <a:pPr indent="0" lvl="0" marL="0" marR="0" rtl="0" algn="ctr">
-              <a:spcBef>
-                <a:spcPts val="0"/>
-              </a:spcBef>
-              <a:spcAft>
-                <a:spcPts val="0"/>
-              </a:spcAft>
-              <a:buNone/>
-            </a:pPr>
-            <a:r>
-              <a:t/>
-            </a:r>
-            <a:endParaRPr b="0" i="0" sz="1800" u="none" cap="none" strike="noStrike">
-              <a:solidFill>
-                <a:schemeClr val="dk1"/>
-              </a:solidFill>
-              <a:latin typeface="Calibri"/>
-              <a:ea typeface="Calibri"/>
-              <a:cs typeface="Calibri"/>
-              <a:sym typeface="Calibri"/>
-            </a:endParaRPr>
-          </a:p>
-        </p:txBody>
-      </p:sp>
-    </p:spTree>
-  </p:cSld>
-  <p:clrMapOvr>
-    <a:masterClrMapping/>
-  </p:clrMapOvr>
-</p:sld>
+          <a:prstDash val="solid"/>
+        </a:ln>
+      </a:lnStyleLst>
+      <a:effectStyleLst>
+        <a:effectStyle>
+          <a:effectLst>
+            <a:outerShdw blurRad="40000" dist="20000" dir="5400000" rotWithShape="0">
+              <a:srgbClr val="000000">
+                <a:alpha val="38000"/>
+              </a:srgbClr>
+            </a:outerShdw>
+          </a:effectLst>
+        </a:effectStyle>
+        <a:effectStyle>
+          <a:effectLst>
+            <a:outerShdw blurRad="40000" dist="23000" dir="5400000" rotWithShape="0">
+              <a:srgbClr val="000000">
+                <a:alpha val="35000"/>
+              </a:srgbClr>
+            </a:outerShdw>
+          </a:effectLst>
+        </a:effectStyle>
+        <a:effectStyle>
+          <a:effectLst>
+            <a:outerShdw blurRad="40000" dist="23000" dir="5400000" rotWithShape="0">
+              <a:srgbClr val="000000">
+                <a:alpha val="35000"/>
+              </a:srgbClr>
+            </a:outerShdw>
+          </a:effectLst>
+          <a:scene3d>
+            <a:camera prst="orthographicFront">
+              <a:rot lat="0" lon="0" rev="0"/>
+            </a:camera>
+            <a:lightRig rig="threePt" dir="t">
+              <a:rot lat="0" lon="0" rev="1200000"/>
+            </a:lightRig>
+          </a:scene3d>
+          <a:sp3d>
+            <a:bevelT w="63500" h="25400"/>
+          </a:sp3d>
+        </a:effectStyle>
+      </a:effectStyleLst>
+      <a:bgFillStyleLst>
+        <a:solidFill>
+          <a:schemeClr val="phClr"/>
+        </a:solidFill>
+        <a:gradFill rotWithShape="1">
+          <a:gsLst>
+            <a:gs pos="0">
+              <a:schemeClr val="phClr">
+                <a:tint val="40000"/>
+                <a:satMod val="350000"/>
+              </a:schemeClr>
+            </a:gs>
+            <a:gs pos="40000">
+              <a:schemeClr val="phClr">
+                <a:tint val="45000"/>
+                <a:shade val="99000"/>
+                <a:satMod val="350000"/>
+              </a:schemeClr>
+            </a:gs>
+            <a:gs pos="100000">
+              <a:schemeClr val="phClr">
+                <a:shade val="20000"/>
+                <a:satMod val="255000"/>
+              </a:schemeClr>
+            </a:gs>
+          </a:gsLst>
+          <a:path path="circle">
+            <a:fillToRect l="50000" t="-80000" r="50000" b="180000"/>
+          </a:path>
+        </a:gradFill>
+        <a:gradFill rotWithShape="1">
+          <a:gsLst>
+            <a:gs pos="0">
+              <a:schemeClr val="phClr">
+                <a:tint val="80000"/>
+                <a:satMod val="300000"/>
+              </a:schemeClr>
+            </a:gs>
+            <a:gs pos="100000">
+              <a:schemeClr val="phClr">
+                <a:shade val="30000"/>
+                <a:satMod val="200000"/>
+              </a:schemeClr>
+            </a:gs>
+          </a:gsLst>
+          <a:path path="circle">
+            <a:fillToRect l="50000" t="50000" r="50000" b="50000"/>
+          </a:path>
+        </a:gradFill>
+      </a:bgFillStyleLst>
+    </a:fmtScheme>
+  </a:themeElements>
+</a:theme>
 </file>
 
-<file path=ppt/theme/theme1.xml><?xml version="1.0" encoding="utf-8"?>
+<file path=ppt/theme/theme2.xml><?xml version="1.0" encoding="utf-8"?>
 <a:theme xmlns:a="http://schemas.openxmlformats.org/drawingml/2006/main" xmlns:r="http://schemas.openxmlformats.org/officeDocument/2006/relationships" name="Office Theme">
   <a:themeElements>
     <a:clrScheme name="Office">
@@ -19121,283 +20159,4 @@
     </a:fmtScheme>
   </a:themeElements>
 </a:theme>
-</file>
-
-<file path=ppt/theme/theme2.xml><?xml version="1.0" encoding="utf-8"?>
-<a:theme xmlns:a="http://schemas.openxmlformats.org/drawingml/2006/main" xmlns:r="http://schemas.openxmlformats.org/officeDocument/2006/relationships">
-  <a:themeElements>
-    <a:clrScheme name="Default">
-      <a:dk1>
-        <a:srgbClr val="000000"/>
-      </a:dk1>
-      <a:lt1>
-        <a:srgbClr val="FFFFFF"/>
-      </a:lt1>
-      <a:dk2>
-        <a:srgbClr val="158158"/>
-      </a:dk2>
-      <a:lt2>
-        <a:srgbClr val="F3F3F3"/>
-      </a:lt2>
-      <a:accent1>
-        <a:srgbClr val="058DC7"/>
-      </a:accent1>
-      <a:accent2>
-        <a:srgbClr val="50B432"/>
-      </a:accent2>
-      <a:accent3>
-        <a:srgbClr val="ED561B"/>
-      </a:accent3>
-      <a:accent4>
-        <a:srgbClr val="EDEF00"/>
-      </a:accent4>
-      <a:accent5>
-        <a:srgbClr val="24CBE5"/>
-      </a:accent5>
-      <a:accent6>
-        <a:srgbClr val="64E572"/>
-      </a:accent6>
-      <a:hlink>
-        <a:srgbClr val="2200CC"/>
-      </a:hlink>
-      <a:folHlink>
-        <a:srgbClr val="551A8B"/>
-      </a:folHlink>
-    </a:clrScheme>
-    <a:fontScheme name="Office">
-      <a:majorFont>
-        <a:latin typeface="Arial"/>
-        <a:ea typeface=""/>
-        <a:cs typeface=""/>
-        <a:font script="Jpan" typeface="ＭＳ Ｐゴシック"/>
-        <a:font script="Hang" typeface="맑은 고딕"/>
-        <a:font script="Hans" typeface="宋体"/>
-        <a:font script="Hant" typeface="新細明體"/>
-        <a:font script="Arab" typeface="Times New Roman"/>
-        <a:font script="Hebr" typeface="Times New Roman"/>
-        <a:font script="Thai" typeface="Angsana New"/>
-        <a:font script="Ethi" typeface="Nyala"/>
-        <a:font script="Beng" typeface="Vrinda"/>
-        <a:font script="Gujr" typeface="Shruti"/>
-        <a:font script="Khmr" typeface="MoolBoran"/>
-        <a:font script="Knda" typeface="Tunga"/>
-        <a:font script="Guru" typeface="Raavi"/>
-        <a:font script="Cans" typeface="Euphemia"/>
-        <a:font script="Cher" typeface="Plantagenet Cherokee"/>
-        <a:font script="Yiii" typeface="Microsoft Yi Baiti"/>
-        <a:font script="Tibt" typeface="Microsoft Himalaya"/>
-        <a:font script="Thaa" typeface="MV Boli"/>
-        <a:font script="Deva" typeface="Mangal"/>
-        <a:font script="Telu" typeface="Gautami"/>
-        <a:font script="Taml" typeface="Latha"/>
-        <a:font script="Syrc" typeface="Estrangelo Edessa"/>
-        <a:font script="Orya" typeface="Kalinga"/>
-        <a:font script="Mlym" typeface="Kartika"/>
-        <a:font script="Laoo" typeface="DokChampa"/>
-        <a:font script="Sinh" typeface="Iskoola Pota"/>
-        <a:font script="Mong" typeface="Mongolian Baiti"/>
-        <a:font script="Viet" typeface="Times New Roman"/>
-        <a:font script="Uigh" typeface="Microsoft Uighur"/>
-        <a:font script="Geor" typeface="Sylfaen"/>
-      </a:majorFont>
-      <a:minorFont>
-        <a:latin typeface="Arial"/>
-        <a:ea typeface=""/>
-        <a:cs typeface=""/>
-        <a:font script="Jpan" typeface="ＭＳ Ｐゴシック"/>
-        <a:font script="Hang" typeface="맑은 고딕"/>
-        <a:font script="Hans" typeface="宋体"/>
-        <a:font script="Hant" typeface="新細明體"/>
-        <a:font script="Arab" typeface="Arial"/>
-        <a:font script="Hebr" typeface="Arial"/>
-        <a:font script="Thai" typeface="Cordia New"/>
-        <a:font script="Ethi" typeface="Nyala"/>
-        <a:font script="Beng" typeface="Vrinda"/>
-        <a:font script="Gujr" typeface="Shruti"/>
-        <a:font script="Khmr" typeface="DaunPenh"/>
-        <a:font script="Knda" typeface="Tunga"/>
-        <a:font script="Guru" typeface="Raavi"/>
-        <a:font script="Cans" typeface="Euphemia"/>
-        <a:font script="Cher" typeface="Plantagenet Cherokee"/>
-        <a:font script="Yiii" typeface="Microsoft Yi Baiti"/>
-        <a:font script="Tibt" typeface="Microsoft Himalaya"/>
-        <a:font script="Thaa" typeface="MV Boli"/>
-        <a:font script="Deva" typeface="Mangal"/>
-        <a:font script="Telu" typeface="Gautami"/>
-        <a:font script="Taml" typeface="Latha"/>
-        <a:font script="Syrc" typeface="Estrangelo Edessa"/>
-        <a:font script="Orya" typeface="Kalinga"/>
-        <a:font script="Mlym" typeface="Kartika"/>
-        <a:font script="Laoo" typeface="DokChampa"/>
-        <a:font script="Sinh" typeface="Iskoola Pota"/>
-        <a:font script="Mong" typeface="Mongolian Baiti"/>
-        <a:font script="Viet" typeface="Arial"/>
-        <a:font script="Uigh" typeface="Microsoft Uighur"/>
-        <a:font script="Geor" typeface="Sylfaen"/>
-      </a:minorFont>
-    </a:fontScheme>
-    <a:fmtScheme name="Office">
-      <a:fillStyleLst>
-        <a:solidFill>
-          <a:schemeClr val="phClr"/>
-        </a:solidFill>
-        <a:gradFill rotWithShape="1">
-          <a:gsLst>
-            <a:gs pos="0">
-              <a:schemeClr val="phClr">
-                <a:tint val="50000"/>
-                <a:satMod val="300000"/>
-              </a:schemeClr>
-            </a:gs>
-            <a:gs pos="35000">
-              <a:schemeClr val="phClr">
-                <a:tint val="37000"/>
-                <a:satMod val="300000"/>
-              </a:schemeClr>
-            </a:gs>
-            <a:gs pos="100000">
-              <a:schemeClr val="phClr">
-                <a:tint val="15000"/>
-                <a:satMod val="350000"/>
-              </a:schemeClr>
-            </a:gs>
-          </a:gsLst>
-          <a:lin ang="16200000" scaled="1"/>
-        </a:gradFill>
-        <a:gradFill rotWithShape="1">
-          <a:gsLst>
-            <a:gs pos="0">
-              <a:schemeClr val="phClr">
-                <a:tint val="100000"/>
-                <a:shade val="100000"/>
-                <a:satMod val="130000"/>
-              </a:schemeClr>
-            </a:gs>
-            <a:gs pos="100000">
-              <a:schemeClr val="phClr">
-                <a:tint val="50000"/>
-                <a:shade val="100000"/>
-                <a:satMod val="350000"/>
-              </a:schemeClr>
-            </a:gs>
-          </a:gsLst>
-          <a:lin ang="16200000" scaled="0"/>
-        </a:gradFill>
-      </a:fillStyleLst>
-      <a:lnStyleLst>
-        <a:ln w="9525" cap="flat" cmpd="sng" algn="ctr">
-          <a:solidFill>
-            <a:schemeClr val="phClr">
-              <a:shade val="95000"/>
-              <a:satMod val="105000"/>
-            </a:schemeClr>
-          </a:solidFill>
-          <a:prstDash val="solid"/>
-        </a:ln>
-        <a:ln w="25400" cap="flat" cmpd="sng" algn="ctr">
-          <a:solidFill>
-            <a:schemeClr val="phClr"/>
-          </a:solidFill>
-          <a:prstDash val="solid"/>
-        </a:ln>
-        <a:ln w="38100" cap="flat" cmpd="sng" algn="ctr">
-          <a:solidFill>
-            <a:schemeClr val="phClr"/>
-          </a:solidFill>
-          <a:prstDash val="solid"/>
-        </a:ln>
-      </a:lnStyleLst>
-      <a:effectStyleLst>
-        <a:effectStyle>
-          <a:effectLst>
-            <a:outerShdw blurRad="40000" dist="20000" dir="5400000" rotWithShape="0">
-              <a:srgbClr val="000000">
-                <a:alpha val="38000"/>
-              </a:srgbClr>
-            </a:outerShdw>
-          </a:effectLst>
-        </a:effectStyle>
-        <a:effectStyle>
-          <a:effectLst>
-            <a:outerShdw blurRad="40000" dist="23000" dir="5400000" rotWithShape="0">
-              <a:srgbClr val="000000">
-                <a:alpha val="35000"/>
-              </a:srgbClr>
-            </a:outerShdw>
-          </a:effectLst>
-        </a:effectStyle>
-        <a:effectStyle>
-          <a:effectLst>
-            <a:outerShdw blurRad="40000" dist="23000" dir="5400000" rotWithShape="0">
-              <a:srgbClr val="000000">
-                <a:alpha val="35000"/>
-              </a:srgbClr>
-            </a:outerShdw>
-          </a:effectLst>
-          <a:scene3d>
-            <a:camera prst="orthographicFront">
-              <a:rot lat="0" lon="0" rev="0"/>
-            </a:camera>
-            <a:lightRig rig="threePt" dir="t">
-              <a:rot lat="0" lon="0" rev="1200000"/>
-            </a:lightRig>
-          </a:scene3d>
-          <a:sp3d>
-            <a:bevelT w="63500" h="25400"/>
-          </a:sp3d>
-        </a:effectStyle>
-      </a:effectStyleLst>
-      <a:bgFillStyleLst>
-        <a:solidFill>
-          <a:schemeClr val="phClr"/>
-        </a:solidFill>
-        <a:gradFill rotWithShape="1">
-          <a:gsLst>
-            <a:gs pos="0">
-              <a:schemeClr val="phClr">
-                <a:tint val="40000"/>
-                <a:satMod val="350000"/>
-              </a:schemeClr>
-            </a:gs>
-            <a:gs pos="40000">
-              <a:schemeClr val="phClr">
-                <a:tint val="45000"/>
-                <a:shade val="99000"/>
-                <a:satMod val="350000"/>
-              </a:schemeClr>
-            </a:gs>
-            <a:gs pos="100000">
-              <a:schemeClr val="phClr">
-                <a:shade val="20000"/>
-                <a:satMod val="255000"/>
-              </a:schemeClr>
-            </a:gs>
-          </a:gsLst>
-          <a:path path="circle">
-            <a:fillToRect l="50000" t="-80000" r="50000" b="180000"/>
-          </a:path>
-        </a:gradFill>
-        <a:gradFill rotWithShape="1">
-          <a:gsLst>
-            <a:gs pos="0">
-              <a:schemeClr val="phClr">
-                <a:tint val="80000"/>
-                <a:satMod val="300000"/>
-              </a:schemeClr>
-            </a:gs>
-            <a:gs pos="100000">
-              <a:schemeClr val="phClr">
-                <a:shade val="30000"/>
-                <a:satMod val="200000"/>
-              </a:schemeClr>
-            </a:gs>
-          </a:gsLst>
-          <a:path path="circle">
-            <a:fillToRect l="50000" t="50000" r="50000" b="50000"/>
-          </a:path>
-        </a:gradFill>
-      </a:bgFillStyleLst>
-    </a:fmtScheme>
-  </a:themeElements>
-</a:theme>
 </file>